--- a/public/retrieval-challenge-grid-template.pptx
+++ b/public/retrieval-challenge-grid-template.pptx
@@ -2,13 +2,13 @@
 <file path=ppt/presentation.xml><?xml version="1.0" encoding="utf-8"?>
 <p:presentation xmlns:p="http://schemas.openxmlformats.org/presentationml/2006/main">
   <p:sldMasterIdLst>
-    <p:sldMasterId xmlns:r="http://schemas.openxmlformats.org/officeDocument/2006/relationships" id="2147483648" r:id="Rffc76f4a7ea6480f"/>
+    <p:sldMasterId xmlns:r="http://schemas.openxmlformats.org/officeDocument/2006/relationships" id="2147483648" r:id="R4736bc12be754355"/>
   </p:sldMasterIdLst>
   <p:notesMasterIdLst>
-    <p:notesMasterId xmlns:r="http://schemas.openxmlformats.org/officeDocument/2006/relationships" r:id="R68b0e3f08b9f4be8"/>
+    <p:notesMasterId xmlns:r="http://schemas.openxmlformats.org/officeDocument/2006/relationships" r:id="R31e9517f4e1e4d4d"/>
   </p:notesMasterIdLst>
   <p:sldIdLst>
-    <p:sldId xmlns:r="http://schemas.openxmlformats.org/officeDocument/2006/relationships" id="256" r:id="Red2a174866d5482a"/>
+    <p:sldId xmlns:r="http://schemas.openxmlformats.org/officeDocument/2006/relationships" id="256" r:id="Rd2ac35f1e3104989"/>
   </p:sldIdLst>
   <p:sldSz cx="12192000" cy="6858000"/>
   <p:notesSz cx="6858000" cy="9144000"/>
@@ -442,7 +442,7 @@
           <a:lstStyle xmlns:a="http://schemas.openxmlformats.org/drawingml/2006/main"/>
           <a:p xmlns:a="http://schemas.openxmlformats.org/drawingml/2006/main">
             <a:r>
-              <a:t>Teacher setup: Replace bracketed text before teaching. Every text box is editable. Duplicate the slide for checked answers or a second prompt. Keep prompt and answer sides separate when printing cards.</a:t>
+              <a:t>Teacher setup: Replace bracketed text before teaching. All text and shapes are editable. Duplicate the slide for answers or another prompt. For card activities, separate prompt and answer sides before printing.</a:t>
             </a:r>
           </a:p>
           <a:p xmlns:a="http://schemas.openxmlformats.org/drawingml/2006/main">
@@ -452,17 +452,12 @@
           </a:p>
           <a:p xmlns:a="http://schemas.openxmlformats.org/drawingml/2006/main">
             <a:r>
-              <a:t>Activity: Retrieval challenge grid</a:t>
-            </a:r>
-          </a:p>
-          <a:p xmlns:a="http://schemas.openxmlformats.org/drawingml/2006/main">
-            <a:r>
               <a:t>Materials: A small teacher-made grid and checked answers</a:t>
             </a:r>
           </a:p>
           <a:p xmlns:a="http://schemas.openxmlformats.org/drawingml/2006/main">
             <a:r>
-              <a:t>Suggested total time including feedback: 8 minutes.</a:t>
+              <a:t>Suggested time including feedback: 8 minutes.</a:t>
             </a:r>
           </a:p>
           <a:p xmlns:a="http://schemas.openxmlformats.org/drawingml/2006/main">
@@ -505,26 +500,6 @@
               <a:t>Adapt: Use fewer cells or oral responses; label categories so colour is never the only cue.</a:t>
             </a:r>
           </a:p>
-          <a:p xmlns:a="http://schemas.openxmlformats.org/drawingml/2006/main">
-            <a:r>
-              <a:t>Credit: Kate Jones — Retrieval Practice Challenge Grids</a:t>
-            </a:r>
-          </a:p>
-          <a:p xmlns:a="http://schemas.openxmlformats.org/drawingml/2006/main">
-            <a:r>
-              <a:t>Jones links her challenge grid to content taught at different times. TNT uses time labels as well as colour and keeps points optional.</a:t>
-            </a:r>
-          </a:p>
-          <a:p xmlns:a="http://schemas.openxmlformats.org/drawingml/2006/main">
-            <a:r>
-              <a:t>Source: https://tile.psy.gla.ac.uk/2019/12/03/tile-share-best-practice-retrieval-practice-research-and-resources-for-every-classroom-by-kate-jones/</a:t>
-            </a:r>
-          </a:p>
-          <a:p xmlns:a="http://schemas.openxmlformats.org/drawingml/2006/main">
-            <a:r>
-              <a:t>Full guide: https://tnt-teaching-tools.github.io/cold-call-classroom/retrieval-challenge-grid.html</a:t>
-            </a:r>
-          </a:p>
         </p:txBody>
       </p:sp>
       <p:sp>
@@ -569,7 +544,7 @@
           <p:cNvPr id="4" name="Accent rule">
             <a:extLst xmlns:a="http://schemas.openxmlformats.org/drawingml/2006/main">
               <a:ext uri="{FF2B5EF4-FFF2-40B4-BE49-F238E27FC236}">
-                <a16:creationId xmlns:a16="http://schemas.microsoft.com/office/drawing/2014/main" id="{3F11E4D1-AE4D-46B5-AFFE-4105782B8ACD}"/>
+                <a16:creationId xmlns:a16="http://schemas.microsoft.com/office/drawing/2014/main" id="{5768A53F-F1C6-4E74-A9F8-83154C9D8396}"/>
               </a:ext>
             </a:extLst>
           </p:cNvPr>
@@ -600,7 +575,7 @@
           <p:cNvPr id="2" name="Title">
             <a:extLst xmlns:a="http://schemas.openxmlformats.org/drawingml/2006/main">
               <a:ext uri="{FF2B5EF4-FFF2-40B4-BE49-F238E27FC236}">
-                <a16:creationId xmlns:a16="http://schemas.microsoft.com/office/drawing/2014/main" id="{258DB07A-3F6C-4166-94BE-F39F592F0031}"/>
+                <a16:creationId xmlns:a16="http://schemas.microsoft.com/office/drawing/2014/main" id="{0D768073-125D-46DC-9818-908C01EBB515}"/>
               </a:ext>
             </a:extLst>
           </p:cNvPr>
@@ -747,7 +722,7 @@
           <p:cNvPr id="3" name="Subtitle">
             <a:extLst xmlns:a="http://schemas.openxmlformats.org/drawingml/2006/main">
               <a:ext uri="{FF2B5EF4-FFF2-40B4-BE49-F238E27FC236}">
-                <a16:creationId xmlns:a16="http://schemas.microsoft.com/office/drawing/2014/main" id="{01A41397-3BE9-4FDE-AFF7-30C41AD28731}"/>
+                <a16:creationId xmlns:a16="http://schemas.microsoft.com/office/drawing/2014/main" id="{AFE8011B-8AE2-4D8E-9D9A-1CB76CCDE957}"/>
               </a:ext>
             </a:extLst>
           </p:cNvPr>
@@ -911,7 +886,7 @@
           <p:cNvPr id="3" name="Accent rule">
             <a:extLst xmlns:a="http://schemas.openxmlformats.org/drawingml/2006/main">
               <a:ext uri="{FF2B5EF4-FFF2-40B4-BE49-F238E27FC236}">
-                <a16:creationId xmlns:a16="http://schemas.microsoft.com/office/drawing/2014/main" id="{CABFE25A-A3C7-40E4-AE97-1AB0D0E9C9E1}"/>
+                <a16:creationId xmlns:a16="http://schemas.microsoft.com/office/drawing/2014/main" id="{57E95F3A-FD7E-484A-87E8-845BD5C02515}"/>
               </a:ext>
             </a:extLst>
           </p:cNvPr>
@@ -942,7 +917,7 @@
           <p:cNvPr id="2" name="Section title">
             <a:extLst xmlns:a="http://schemas.openxmlformats.org/drawingml/2006/main">
               <a:ext uri="{FF2B5EF4-FFF2-40B4-BE49-F238E27FC236}">
-                <a16:creationId xmlns:a16="http://schemas.microsoft.com/office/drawing/2014/main" id="{12FE6EEB-DE0A-4106-99DF-B665A335E119}"/>
+                <a16:creationId xmlns:a16="http://schemas.microsoft.com/office/drawing/2014/main" id="{0B2163C1-F14E-439D-A570-3CF6AF1CA653}"/>
               </a:ext>
             </a:extLst>
           </p:cNvPr>
@@ -1106,7 +1081,7 @@
           <p:cNvPr id="4" name="Accent rule">
             <a:extLst xmlns:a="http://schemas.openxmlformats.org/drawingml/2006/main">
               <a:ext uri="{FF2B5EF4-FFF2-40B4-BE49-F238E27FC236}">
-                <a16:creationId xmlns:a16="http://schemas.microsoft.com/office/drawing/2014/main" id="{274001BE-BE2F-4BC0-937B-CDFE4B4A0AD2}"/>
+                <a16:creationId xmlns:a16="http://schemas.microsoft.com/office/drawing/2014/main" id="{D5AFCE86-493F-462B-92D8-82648CF04022}"/>
               </a:ext>
             </a:extLst>
           </p:cNvPr>
@@ -1137,7 +1112,7 @@
           <p:cNvPr id="2" name="Title">
             <a:extLst xmlns:a="http://schemas.openxmlformats.org/drawingml/2006/main">
               <a:ext uri="{FF2B5EF4-FFF2-40B4-BE49-F238E27FC236}">
-                <a16:creationId xmlns:a16="http://schemas.microsoft.com/office/drawing/2014/main" id="{74815964-A4FE-4F0D-90A5-5873975C1996}"/>
+                <a16:creationId xmlns:a16="http://schemas.microsoft.com/office/drawing/2014/main" id="{5D7D585A-D278-461A-B082-31426EF1D7BA}"/>
               </a:ext>
             </a:extLst>
           </p:cNvPr>
@@ -1284,7 +1259,7 @@
           <p:cNvPr id="3" name="Body">
             <a:extLst xmlns:a="http://schemas.openxmlformats.org/drawingml/2006/main">
               <a:ext uri="{FF2B5EF4-FFF2-40B4-BE49-F238E27FC236}">
-                <a16:creationId xmlns:a16="http://schemas.microsoft.com/office/drawing/2014/main" id="{281781AD-A85A-44BB-A82F-3EC30914D9F4}"/>
+                <a16:creationId xmlns:a16="http://schemas.microsoft.com/office/drawing/2014/main" id="{CE00C41E-B6A2-4DCE-9967-A75A9333ABBD}"/>
               </a:ext>
             </a:extLst>
           </p:cNvPr>
@@ -1448,7 +1423,7 @@
           <p:cNvPr id="5" name="Accent rule">
             <a:extLst xmlns:a="http://schemas.openxmlformats.org/drawingml/2006/main">
               <a:ext uri="{FF2B5EF4-FFF2-40B4-BE49-F238E27FC236}">
-                <a16:creationId xmlns:a16="http://schemas.microsoft.com/office/drawing/2014/main" id="{73EBD3AA-2B9A-4CA0-9038-5B7F80967F0B}"/>
+                <a16:creationId xmlns:a16="http://schemas.microsoft.com/office/drawing/2014/main" id="{DB440F4C-38D8-4C51-A75E-C99AC22E1F7C}"/>
               </a:ext>
             </a:extLst>
           </p:cNvPr>
@@ -1479,7 +1454,7 @@
           <p:cNvPr id="2" name="Title">
             <a:extLst xmlns:a="http://schemas.openxmlformats.org/drawingml/2006/main">
               <a:ext uri="{FF2B5EF4-FFF2-40B4-BE49-F238E27FC236}">
-                <a16:creationId xmlns:a16="http://schemas.microsoft.com/office/drawing/2014/main" id="{6E3D60A1-D401-47E3-A6E8-D6C1CB92ED46}"/>
+                <a16:creationId xmlns:a16="http://schemas.microsoft.com/office/drawing/2014/main" id="{67381F62-6CE9-46A2-8EA2-C545B1888994}"/>
               </a:ext>
             </a:extLst>
           </p:cNvPr>
@@ -1626,7 +1601,7 @@
           <p:cNvPr id="3" name="Left column">
             <a:extLst xmlns:a="http://schemas.openxmlformats.org/drawingml/2006/main">
               <a:ext uri="{FF2B5EF4-FFF2-40B4-BE49-F238E27FC236}">
-                <a16:creationId xmlns:a16="http://schemas.microsoft.com/office/drawing/2014/main" id="{2C02D771-8819-48D9-B0FF-38E4C33E0F19}"/>
+                <a16:creationId xmlns:a16="http://schemas.microsoft.com/office/drawing/2014/main" id="{DCB5916B-AD20-4FA3-8F7D-3005557D2670}"/>
               </a:ext>
             </a:extLst>
           </p:cNvPr>
@@ -1773,7 +1748,7 @@
           <p:cNvPr id="4" name="Right column">
             <a:extLst xmlns:a="http://schemas.openxmlformats.org/drawingml/2006/main">
               <a:ext uri="{FF2B5EF4-FFF2-40B4-BE49-F238E27FC236}">
-                <a16:creationId xmlns:a16="http://schemas.microsoft.com/office/drawing/2014/main" id="{E2BC1BEE-12D6-4983-92C8-B4BBEB647F7E}"/>
+                <a16:creationId xmlns:a16="http://schemas.microsoft.com/office/drawing/2014/main" id="{21FC1509-396E-4225-8AC8-D489C2FA98FF}"/>
               </a:ext>
             </a:extLst>
           </p:cNvPr>
@@ -1937,7 +1912,7 @@
           <p:cNvPr id="4" name="Accent rule">
             <a:extLst xmlns:a="http://schemas.openxmlformats.org/drawingml/2006/main">
               <a:ext uri="{FF2B5EF4-FFF2-40B4-BE49-F238E27FC236}">
-                <a16:creationId xmlns:a16="http://schemas.microsoft.com/office/drawing/2014/main" id="{AA9CFBC7-98A0-43C6-BA06-5EC15B3F72E1}"/>
+                <a16:creationId xmlns:a16="http://schemas.microsoft.com/office/drawing/2014/main" id="{A3C12444-8190-4F56-9F51-8A780B4C538A}"/>
               </a:ext>
             </a:extLst>
           </p:cNvPr>
@@ -1968,7 +1943,7 @@
           <p:cNvPr id="2" name="Title">
             <a:extLst xmlns:a="http://schemas.openxmlformats.org/drawingml/2006/main">
               <a:ext uri="{FF2B5EF4-FFF2-40B4-BE49-F238E27FC236}">
-                <a16:creationId xmlns:a16="http://schemas.microsoft.com/office/drawing/2014/main" id="{02235D27-48D6-46FF-A84F-9292D50E828F}"/>
+                <a16:creationId xmlns:a16="http://schemas.microsoft.com/office/drawing/2014/main" id="{EA5C81C9-A672-4F72-B926-3F62FDB6EB4A}"/>
               </a:ext>
             </a:extLst>
           </p:cNvPr>
@@ -2115,7 +2090,7 @@
           <p:cNvPr id="3" name="Left column">
             <a:extLst xmlns:a="http://schemas.openxmlformats.org/drawingml/2006/main">
               <a:ext uri="{FF2B5EF4-FFF2-40B4-BE49-F238E27FC236}">
-                <a16:creationId xmlns:a16="http://schemas.microsoft.com/office/drawing/2014/main" id="{488E2B04-CC57-4F6C-A55F-378F497684D6}"/>
+                <a16:creationId xmlns:a16="http://schemas.microsoft.com/office/drawing/2014/main" id="{345C90A0-983D-4570-87C4-D9883A5B999D}"/>
               </a:ext>
             </a:extLst>
           </p:cNvPr>
@@ -2300,12 +2275,12 @@
   </p:cSld>
   <p:clrMap bg1="lt1" tx1="dk1" bg2="lt2" tx2="dk2" accent1="accent1" accent2="accent2" accent3="accent3" accent4="accent4" accent5="accent5" accent6="accent6" hlink="hlink" folHlink="folHlink"/>
   <p:sldLayoutIdLst>
-    <p:sldLayoutId xmlns:r="http://schemas.openxmlformats.org/officeDocument/2006/relationships" id="2147483649" r:id="R0701e02fbf0145aa"/>
-    <p:sldLayoutId xmlns:r="http://schemas.openxmlformats.org/officeDocument/2006/relationships" id="2147483650" r:id="R2b1c147ddfbb4e21"/>
-    <p:sldLayoutId xmlns:r="http://schemas.openxmlformats.org/officeDocument/2006/relationships" id="2147483651" r:id="Rd6c668355ce64dd2"/>
-    <p:sldLayoutId xmlns:r="http://schemas.openxmlformats.org/officeDocument/2006/relationships" id="2147483652" r:id="R47b092a36f794fbe"/>
-    <p:sldLayoutId xmlns:r="http://schemas.openxmlformats.org/officeDocument/2006/relationships" id="2147483653" r:id="Rc42a3b28ff744e3f"/>
-    <p:sldLayoutId xmlns:r="http://schemas.openxmlformats.org/officeDocument/2006/relationships" id="2147483654" r:id="R3f417722183a4d93"/>
+    <p:sldLayoutId xmlns:r="http://schemas.openxmlformats.org/officeDocument/2006/relationships" id="2147483649" r:id="R1a4d919195544d79"/>
+    <p:sldLayoutId xmlns:r="http://schemas.openxmlformats.org/officeDocument/2006/relationships" id="2147483650" r:id="Ra89de61b6c0b407e"/>
+    <p:sldLayoutId xmlns:r="http://schemas.openxmlformats.org/officeDocument/2006/relationships" id="2147483651" r:id="Rfd6ce27a52ac4f40"/>
+    <p:sldLayoutId xmlns:r="http://schemas.openxmlformats.org/officeDocument/2006/relationships" id="2147483652" r:id="R49b415a5eb1542b3"/>
+    <p:sldLayoutId xmlns:r="http://schemas.openxmlformats.org/officeDocument/2006/relationships" id="2147483653" r:id="R57fdb8eb8ff343a0"/>
+    <p:sldLayoutId xmlns:r="http://schemas.openxmlformats.org/officeDocument/2006/relationships" id="2147483654" r:id="R7aa4cf4ce5c241a1"/>
   </p:sldLayoutIdLst>
   <p:txStyles>
     <p:titleStyle>
@@ -2838,7 +2813,7 @@
     <p:bg>
       <p:bgPr>
         <a:solidFill xmlns:a="http://schemas.openxmlformats.org/drawingml/2006/main">
-          <a:srgbClr val="FFFCF2"/>
+          <a:srgbClr val="FFFDF5"/>
         </a:solidFill>
       </p:bgPr>
     </p:bg>
@@ -2853,10 +2828,10 @@
       </p:grpSpPr>
       <p:sp>
         <p:nvSpPr>
-          <p:cNvPr id="12" name="">
-            <a:extLst xmlns:a="http://schemas.openxmlformats.org/drawingml/2006/main">
-              <a:ext uri="{FF2B5EF4-FFF2-40B4-BE49-F238E27FC236}">
-                <a16:creationId xmlns:a16="http://schemas.microsoft.com/office/drawing/2014/main" id="{A58322DE-800C-4EFF-B0C1-0A9A64A0CCA1}"/>
+          <p:cNvPr id="39" name="">
+            <a:extLst xmlns:a="http://schemas.openxmlformats.org/drawingml/2006/main">
+              <a:ext uri="{FF2B5EF4-FFF2-40B4-BE49-F238E27FC236}">
+                <a16:creationId xmlns:a16="http://schemas.microsoft.com/office/drawing/2014/main" id="{DC9EBCDD-5585-4834-AD67-226059DF6805}"/>
               </a:ext>
             </a:extLst>
           </p:cNvPr>
@@ -2867,8 +2842,8 @@
         </p:nvSpPr>
         <p:spPr>
           <a:xfrm xmlns:a="http://schemas.openxmlformats.org/drawingml/2006/main">
-            <a:off x="609600" y="333375"/>
-            <a:ext cx="10972800" cy="714375"/>
+            <a:off x="609600" y="323850"/>
+            <a:ext cx="10972800" cy="666750"/>
           </a:xfrm>
           <a:prstGeom xmlns:a="http://schemas.openxmlformats.org/drawingml/2006/main" prst="rect">
             <a:avLst/>
@@ -2885,23 +2860,23 @@
           <a:lstStyle xmlns:a="http://schemas.openxmlformats.org/drawingml/2006/main"/>
           <a:p xmlns:a="http://schemas.openxmlformats.org/drawingml/2006/main">
             <a:pPr>
-              <a:defRPr sz="4050" b="1">
+              <a:defRPr sz="3450" b="1">
                 <a:solidFill>
-                  <a:srgbClr val="242720"/>
+                  <a:srgbClr val="263C3A"/>
                 </a:solidFill>
-                <a:latin typeface="Arial"/>
-                <a:ea typeface="Arial"/>
-                <a:cs typeface="Arial"/>
+                <a:latin typeface="DejaVu Sans"/>
+                <a:ea typeface="DejaVu Sans"/>
+                <a:cs typeface="DejaVu Sans"/>
               </a:defRPr>
             </a:pPr>
             <a:r>
-              <a:rPr sz="4050" b="1">
+              <a:rPr sz="3450" b="1">
                 <a:solidFill>
-                  <a:srgbClr val="242720"/>
+                  <a:srgbClr val="263C3A"/>
                 </a:solidFill>
-                <a:latin typeface="Arial"/>
-                <a:ea typeface="Arial"/>
-                <a:cs typeface="Arial"/>
+                <a:latin typeface="DejaVu Sans"/>
+                <a:ea typeface="DejaVu Sans"/>
+                <a:cs typeface="DejaVu Sans"/>
               </a:rPr>
               <a:t>Retrieval challenge grid</a:t>
             </a:r>
@@ -2913,7 +2888,7 @@
           <p:cNvPr id="2" name="">
             <a:extLst xmlns:a="http://schemas.openxmlformats.org/drawingml/2006/main">
               <a:ext uri="{FF2B5EF4-FFF2-40B4-BE49-F238E27FC236}">
-                <a16:creationId xmlns:a16="http://schemas.microsoft.com/office/drawing/2014/main" id="{0BFEF72C-B922-436A-AD4F-D7AE4F492E6E}"/>
+                <a16:creationId xmlns:a16="http://schemas.microsoft.com/office/drawing/2014/main" id="{B844859C-35EA-4931-8886-F46A240E61F6}"/>
               </a:ext>
             </a:extLst>
           </p:cNvPr>
@@ -2924,8 +2899,8 @@
         </p:nvSpPr>
         <p:spPr>
           <a:xfrm xmlns:a="http://schemas.openxmlformats.org/drawingml/2006/main">
-            <a:off x="609600" y="1190625"/>
-            <a:ext cx="10972800" cy="476250"/>
+            <a:off x="609600" y="1085850"/>
+            <a:ext cx="10972800" cy="409575"/>
           </a:xfrm>
           <a:prstGeom xmlns:a="http://schemas.openxmlformats.org/drawingml/2006/main" prst="rect">
             <a:avLst/>
@@ -2942,25 +2917,25 @@
           <a:lstStyle xmlns:a="http://schemas.openxmlformats.org/drawingml/2006/main"/>
           <a:p xmlns:a="http://schemas.openxmlformats.org/drawingml/2006/main">
             <a:pPr>
-              <a:defRPr sz="2400" b="0">
+              <a:defRPr sz="2175" b="0">
                 <a:solidFill>
-                  <a:srgbClr val="242720"/>
+                  <a:srgbClr val="687572"/>
                 </a:solidFill>
-                <a:latin typeface="Arial"/>
-                <a:ea typeface="Arial"/>
-                <a:cs typeface="Arial"/>
+                <a:latin typeface="DejaVu Sans"/>
+                <a:ea typeface="DejaVu Sans"/>
+                <a:cs typeface="DejaVu Sans"/>
               </a:defRPr>
             </a:pPr>
             <a:r>
-              <a:rPr sz="2400" b="0">
+              <a:rPr sz="2175" b="0">
                 <a:solidFill>
-                  <a:srgbClr val="242720"/>
+                  <a:srgbClr val="687572"/>
                 </a:solidFill>
-                <a:latin typeface="Arial"/>
-                <a:ea typeface="Arial"/>
-                <a:cs typeface="Arial"/>
+                <a:latin typeface="DejaVu Sans"/>
+                <a:ea typeface="DejaVu Sans"/>
+                <a:cs typeface="DejaVu Sans"/>
               </a:rPr>
-              <a:t>[Add your topic or retrieval focus]</a:t>
+              <a:t>[Your topic or retrieval focus]</a:t>
             </a:r>
           </a:p>
         </p:txBody>
@@ -2970,7 +2945,7 @@
           <p:cNvPr id="3" name="">
             <a:extLst xmlns:a="http://schemas.openxmlformats.org/drawingml/2006/main">
               <a:ext uri="{FF2B5EF4-FFF2-40B4-BE49-F238E27FC236}">
-                <a16:creationId xmlns:a16="http://schemas.microsoft.com/office/drawing/2014/main" id="{A3EC850A-88DC-41C7-AFC5-1B30A0D73A90}"/>
+                <a16:creationId xmlns:a16="http://schemas.microsoft.com/office/drawing/2014/main" id="{52D7431F-6AA0-4F51-A2EB-01AB6CC12FDC}"/>
               </a:ext>
             </a:extLst>
           </p:cNvPr>
@@ -2981,8 +2956,38 @@
         </p:nvSpPr>
         <p:spPr>
           <a:xfrm xmlns:a="http://schemas.openxmlformats.org/drawingml/2006/main">
-            <a:off x="609600" y="1733550"/>
-            <a:ext cx="10972800" cy="400050"/>
+            <a:off x="609600" y="1676400"/>
+            <a:ext cx="10972800" cy="19050"/>
+          </a:xfrm>
+          <a:prstGeom xmlns:a="http://schemas.openxmlformats.org/drawingml/2006/main" prst="rect">
+            <a:avLst/>
+          </a:prstGeom>
+          <a:solidFill xmlns:a="http://schemas.openxmlformats.org/drawingml/2006/main">
+            <a:srgbClr val="A9BDB7"/>
+          </a:solidFill>
+          <a:ln xmlns:a="http://schemas.openxmlformats.org/drawingml/2006/main" w="0">
+            <a:noFill/>
+          </a:ln>
+        </p:spPr>
+      </p:sp>
+      <p:sp>
+        <p:nvSpPr>
+          <p:cNvPr id="4" name="">
+            <a:extLst xmlns:a="http://schemas.openxmlformats.org/drawingml/2006/main">
+              <a:ext uri="{FF2B5EF4-FFF2-40B4-BE49-F238E27FC236}">
+                <a16:creationId xmlns:a16="http://schemas.microsoft.com/office/drawing/2014/main" id="{2B04CFFF-4C5D-4B60-B518-E76E19E50E95}"/>
+              </a:ext>
+            </a:extLst>
+          </p:cNvPr>
+          <p:cNvSpPr>
+            <a:spLocks xmlns:a="http://schemas.openxmlformats.org/drawingml/2006/main" noGrp="1"/>
+          </p:cNvSpPr>
+          <p:nvPr/>
+        </p:nvSpPr>
+        <p:spPr>
+          <a:xfrm xmlns:a="http://schemas.openxmlformats.org/drawingml/2006/main">
+            <a:off x="609600" y="1828800"/>
+            <a:ext cx="4476750" cy="304800"/>
           </a:xfrm>
           <a:prstGeom xmlns:a="http://schemas.openxmlformats.org/drawingml/2006/main" prst="rect">
             <a:avLst/>
@@ -2999,35 +3004,35 @@
           <a:lstStyle xmlns:a="http://schemas.openxmlformats.org/drawingml/2006/main"/>
           <a:p xmlns:a="http://schemas.openxmlformats.org/drawingml/2006/main">
             <a:pPr>
-              <a:defRPr sz="1800" b="0">
+              <a:defRPr sz="1575" b="1">
                 <a:solidFill>
-                  <a:srgbClr val="28534A"/>
+                  <a:srgbClr val="263C3A"/>
                 </a:solidFill>
-                <a:latin typeface="Arial"/>
-                <a:ea typeface="Arial"/>
-                <a:cs typeface="Arial"/>
+                <a:latin typeface="DejaVu Sans"/>
+                <a:ea typeface="DejaVu Sans"/>
+                <a:cs typeface="DejaVu Sans"/>
               </a:defRPr>
             </a:pPr>
             <a:r>
-              <a:rPr sz="1800" b="0">
+              <a:rPr sz="1575" b="1">
                 <a:solidFill>
-                  <a:srgbClr val="28534A"/>
+                  <a:srgbClr val="263C3A"/>
                 </a:solidFill>
-                <a:latin typeface="Arial"/>
-                <a:ea typeface="Arial"/>
-                <a:cs typeface="Arial"/>
+                <a:latin typeface="DejaVu Sans"/>
+                <a:ea typeface="DejaVu Sans"/>
+                <a:cs typeface="DejaVu Sans"/>
               </a:rPr>
-              <a:t>Recall independently first. Check and improve after feedback.</a:t>
+              <a:t>01  Recall from memory</a:t>
             </a:r>
           </a:p>
         </p:txBody>
       </p:sp>
       <p:sp>
         <p:nvSpPr>
-          <p:cNvPr id="4" name="">
-            <a:extLst xmlns:a="http://schemas.openxmlformats.org/drawingml/2006/main">
-              <a:ext uri="{FF2B5EF4-FFF2-40B4-BE49-F238E27FC236}">
-                <a16:creationId xmlns:a16="http://schemas.microsoft.com/office/drawing/2014/main" id="{5D59C0F9-11AF-423D-A0C0-881F0D1280D2}"/>
+          <p:cNvPr id="5" name="">
+            <a:extLst xmlns:a="http://schemas.openxmlformats.org/drawingml/2006/main">
+              <a:ext uri="{FF2B5EF4-FFF2-40B4-BE49-F238E27FC236}">
+                <a16:creationId xmlns:a16="http://schemas.microsoft.com/office/drawing/2014/main" id="{D97293A7-BBE6-479B-B34C-69C78BF8A237}"/>
               </a:ext>
             </a:extLst>
           </p:cNvPr>
@@ -3038,21 +3043,252 @@
         </p:nvSpPr>
         <p:spPr>
           <a:xfrm xmlns:a="http://schemas.openxmlformats.org/drawingml/2006/main">
-            <a:off x="609600" y="2190750"/>
-            <a:ext cx="3543300" cy="1581150"/>
+            <a:off x="6286500" y="1828800"/>
+            <a:ext cx="5048250" cy="304800"/>
           </a:xfrm>
           <a:prstGeom xmlns:a="http://schemas.openxmlformats.org/drawingml/2006/main" prst="rect">
             <a:avLst/>
           </a:prstGeom>
           <a:noFill xmlns:a="http://schemas.openxmlformats.org/drawingml/2006/main"/>
+          <a:ln xmlns:a="http://schemas.openxmlformats.org/drawingml/2006/main" w="0">
+            <a:noFill/>
+          </a:ln>
+        </p:spPr>
+        <p:txBody>
+          <a:bodyPr xmlns:a="http://schemas.openxmlformats.org/drawingml/2006/main" lIns="0" tIns="0" rIns="0" bIns="0" anchor="t">
+            <a:noAutofit/>
+          </a:bodyPr>
+          <a:lstStyle xmlns:a="http://schemas.openxmlformats.org/drawingml/2006/main"/>
+          <a:p xmlns:a="http://schemas.openxmlformats.org/drawingml/2006/main">
+            <a:pPr>
+              <a:defRPr sz="1575" b="1">
+                <a:solidFill>
+                  <a:srgbClr val="263C3A"/>
+                </a:solidFill>
+                <a:latin typeface="DejaVu Sans"/>
+                <a:ea typeface="DejaVu Sans"/>
+                <a:cs typeface="DejaVu Sans"/>
+              </a:defRPr>
+            </a:pPr>
+            <a:r>
+              <a:rPr sz="1575" b="1">
+                <a:solidFill>
+                  <a:srgbClr val="263C3A"/>
+                </a:solidFill>
+                <a:latin typeface="DejaVu Sans"/>
+                <a:ea typeface="DejaVu Sans"/>
+                <a:cs typeface="DejaVu Sans"/>
+              </a:rPr>
+              <a:t>02  Check and improve</a:t>
+            </a:r>
+          </a:p>
+        </p:txBody>
+      </p:sp>
+      <p:sp>
+        <p:nvSpPr>
+          <p:cNvPr id="6" name="">
+            <a:extLst xmlns:a="http://schemas.openxmlformats.org/drawingml/2006/main">
+              <a:ext uri="{FF2B5EF4-FFF2-40B4-BE49-F238E27FC236}">
+                <a16:creationId xmlns:a16="http://schemas.microsoft.com/office/drawing/2014/main" id="{30DF5F07-BE02-4415-9C70-CB9BFDCA216E}"/>
+              </a:ext>
+            </a:extLst>
+          </p:cNvPr>
+          <p:cNvSpPr>
+            <a:spLocks xmlns:a="http://schemas.openxmlformats.org/drawingml/2006/main" noGrp="1"/>
+          </p:cNvSpPr>
+          <p:nvPr/>
+        </p:nvSpPr>
+        <p:spPr>
+          <a:xfrm xmlns:a="http://schemas.openxmlformats.org/drawingml/2006/main">
+            <a:off x="609600" y="2247900"/>
+            <a:ext cx="3543300" cy="1600200"/>
+          </a:xfrm>
+          <a:prstGeom xmlns:a="http://schemas.openxmlformats.org/drawingml/2006/main" prst="rect">
+            <a:avLst/>
+          </a:prstGeom>
+          <a:solidFill xmlns:a="http://schemas.openxmlformats.org/drawingml/2006/main">
+            <a:srgbClr val="EDF2F5"/>
+          </a:solidFill>
           <a:ln xmlns:a="http://schemas.openxmlformats.org/drawingml/2006/main" w="9525">
             <a:solidFill>
-              <a:srgbClr val="CBD0C4"/>
+              <a:srgbClr val="D4DFDB"/>
             </a:solidFill>
           </a:ln>
         </p:spPr>
+      </p:sp>
+      <p:sp>
+        <p:nvSpPr>
+          <p:cNvPr id="7" name="">
+            <a:extLst xmlns:a="http://schemas.openxmlformats.org/drawingml/2006/main">
+              <a:ext uri="{FF2B5EF4-FFF2-40B4-BE49-F238E27FC236}">
+                <a16:creationId xmlns:a16="http://schemas.microsoft.com/office/drawing/2014/main" id="{E46ED273-F73F-496D-B76B-ED675BD89E69}"/>
+              </a:ext>
+            </a:extLst>
+          </p:cNvPr>
+          <p:cNvSpPr>
+            <a:spLocks xmlns:a="http://schemas.openxmlformats.org/drawingml/2006/main" noGrp="1"/>
+          </p:cNvSpPr>
+          <p:nvPr/>
+        </p:nvSpPr>
+        <p:spPr>
+          <a:xfrm xmlns:a="http://schemas.openxmlformats.org/drawingml/2006/main">
+            <a:off x="800100" y="2419350"/>
+            <a:ext cx="381000" cy="381000"/>
+          </a:xfrm>
+          <a:prstGeom xmlns:a="http://schemas.openxmlformats.org/drawingml/2006/main" prst="ellipse">
+            <a:avLst/>
+          </a:prstGeom>
+          <a:solidFill xmlns:a="http://schemas.openxmlformats.org/drawingml/2006/main">
+            <a:srgbClr val="FFFFFF"/>
+          </a:solidFill>
+          <a:ln xmlns:a="http://schemas.openxmlformats.org/drawingml/2006/main" w="0">
+            <a:noFill/>
+          </a:ln>
+        </p:spPr>
+      </p:sp>
+      <p:sp>
+        <p:nvSpPr>
+          <p:cNvPr id="8" name="">
+            <a:extLst xmlns:a="http://schemas.openxmlformats.org/drawingml/2006/main">
+              <a:ext uri="{FF2B5EF4-FFF2-40B4-BE49-F238E27FC236}">
+                <a16:creationId xmlns:a16="http://schemas.microsoft.com/office/drawing/2014/main" id="{0110D23A-DB53-4B2D-ADC8-01B10405E751}"/>
+              </a:ext>
+            </a:extLst>
+          </p:cNvPr>
+          <p:cNvSpPr>
+            <a:spLocks xmlns:a="http://schemas.openxmlformats.org/drawingml/2006/main" noGrp="1"/>
+          </p:cNvSpPr>
+          <p:nvPr/>
+        </p:nvSpPr>
+        <p:spPr>
+          <a:xfrm xmlns:a="http://schemas.openxmlformats.org/drawingml/2006/main">
+            <a:off x="857250" y="2486025"/>
+            <a:ext cx="342900" cy="285750"/>
+          </a:xfrm>
+          <a:prstGeom xmlns:a="http://schemas.openxmlformats.org/drawingml/2006/main" prst="rect">
+            <a:avLst/>
+          </a:prstGeom>
+          <a:noFill xmlns:a="http://schemas.openxmlformats.org/drawingml/2006/main"/>
+          <a:ln xmlns:a="http://schemas.openxmlformats.org/drawingml/2006/main" w="0">
+            <a:noFill/>
+          </a:ln>
+        </p:spPr>
         <p:txBody>
-          <a:bodyPr xmlns:a="http://schemas.openxmlformats.org/drawingml/2006/main" lIns="142875" tIns="114300" rIns="142875" bIns="0" anchor="t">
+          <a:bodyPr xmlns:a="http://schemas.openxmlformats.org/drawingml/2006/main" lIns="0" tIns="0" rIns="0" bIns="0" anchor="t">
+            <a:noAutofit/>
+          </a:bodyPr>
+          <a:lstStyle xmlns:a="http://schemas.openxmlformats.org/drawingml/2006/main"/>
+          <a:p xmlns:a="http://schemas.openxmlformats.org/drawingml/2006/main">
+            <a:pPr>
+              <a:defRPr sz="1350" b="1">
+                <a:solidFill>
+                  <a:srgbClr val="263C3A"/>
+                </a:solidFill>
+                <a:latin typeface="DejaVu Sans"/>
+                <a:ea typeface="DejaVu Sans"/>
+                <a:cs typeface="DejaVu Sans"/>
+              </a:defRPr>
+            </a:pPr>
+            <a:r>
+              <a:rPr sz="1350" b="1">
+                <a:solidFill>
+                  <a:srgbClr val="263C3A"/>
+                </a:solidFill>
+                <a:latin typeface="DejaVu Sans"/>
+                <a:ea typeface="DejaVu Sans"/>
+                <a:cs typeface="DejaVu Sans"/>
+              </a:rPr>
+              <a:t>01</a:t>
+            </a:r>
+          </a:p>
+        </p:txBody>
+      </p:sp>
+      <p:sp>
+        <p:nvSpPr>
+          <p:cNvPr id="9" name="">
+            <a:extLst xmlns:a="http://schemas.openxmlformats.org/drawingml/2006/main">
+              <a:ext uri="{FF2B5EF4-FFF2-40B4-BE49-F238E27FC236}">
+                <a16:creationId xmlns:a16="http://schemas.microsoft.com/office/drawing/2014/main" id="{ABCF306E-83C4-4671-ABF8-50E9BCCC6C27}"/>
+              </a:ext>
+            </a:extLst>
+          </p:cNvPr>
+          <p:cNvSpPr>
+            <a:spLocks xmlns:a="http://schemas.openxmlformats.org/drawingml/2006/main" noGrp="1"/>
+          </p:cNvSpPr>
+          <p:nvPr/>
+        </p:nvSpPr>
+        <p:spPr>
+          <a:xfrm xmlns:a="http://schemas.openxmlformats.org/drawingml/2006/main">
+            <a:off x="1352550" y="2466975"/>
+            <a:ext cx="2609850" cy="428625"/>
+          </a:xfrm>
+          <a:prstGeom xmlns:a="http://schemas.openxmlformats.org/drawingml/2006/main" prst="rect">
+            <a:avLst/>
+          </a:prstGeom>
+          <a:noFill xmlns:a="http://schemas.openxmlformats.org/drawingml/2006/main"/>
+          <a:ln xmlns:a="http://schemas.openxmlformats.org/drawingml/2006/main" w="0">
+            <a:noFill/>
+          </a:ln>
+        </p:spPr>
+        <p:txBody>
+          <a:bodyPr xmlns:a="http://schemas.openxmlformats.org/drawingml/2006/main" lIns="0" tIns="0" rIns="0" bIns="0" anchor="t">
+            <a:noAutofit/>
+          </a:bodyPr>
+          <a:lstStyle xmlns:a="http://schemas.openxmlformats.org/drawingml/2006/main"/>
+          <a:p xmlns:a="http://schemas.openxmlformats.org/drawingml/2006/main">
+            <a:pPr>
+              <a:defRPr sz="1725" b="1">
+                <a:solidFill>
+                  <a:srgbClr val="263C3A"/>
+                </a:solidFill>
+                <a:latin typeface="DejaVu Sans"/>
+                <a:ea typeface="DejaVu Sans"/>
+                <a:cs typeface="DejaVu Sans"/>
+              </a:defRPr>
+            </a:pPr>
+            <a:r>
+              <a:rPr sz="1725" b="1">
+                <a:solidFill>
+                  <a:srgbClr val="263C3A"/>
+                </a:solidFill>
+                <a:latin typeface="DejaVu Sans"/>
+                <a:ea typeface="DejaVu Sans"/>
+                <a:cs typeface="DejaVu Sans"/>
+              </a:rPr>
+              <a:t>Last lesson</a:t>
+            </a:r>
+          </a:p>
+        </p:txBody>
+      </p:sp>
+      <p:sp>
+        <p:nvSpPr>
+          <p:cNvPr id="10" name="">
+            <a:extLst xmlns:a="http://schemas.openxmlformats.org/drawingml/2006/main">
+              <a:ext uri="{FF2B5EF4-FFF2-40B4-BE49-F238E27FC236}">
+                <a16:creationId xmlns:a16="http://schemas.microsoft.com/office/drawing/2014/main" id="{033B70DE-A642-44AA-8AEA-A1934EC3A47D}"/>
+              </a:ext>
+            </a:extLst>
+          </p:cNvPr>
+          <p:cNvSpPr>
+            <a:spLocks xmlns:a="http://schemas.openxmlformats.org/drawingml/2006/main" noGrp="1"/>
+          </p:cNvSpPr>
+          <p:nvPr/>
+        </p:nvSpPr>
+        <p:spPr>
+          <a:xfrm xmlns:a="http://schemas.openxmlformats.org/drawingml/2006/main">
+            <a:off x="819150" y="2990850"/>
+            <a:ext cx="3124200" cy="695325"/>
+          </a:xfrm>
+          <a:prstGeom xmlns:a="http://schemas.openxmlformats.org/drawingml/2006/main" prst="rect">
+            <a:avLst/>
+          </a:prstGeom>
+          <a:noFill xmlns:a="http://schemas.openxmlformats.org/drawingml/2006/main"/>
+          <a:ln xmlns:a="http://schemas.openxmlformats.org/drawingml/2006/main" w="0">
+            <a:noFill/>
+          </a:ln>
+        </p:spPr>
+        <p:txBody>
+          <a:bodyPr xmlns:a="http://schemas.openxmlformats.org/drawingml/2006/main" lIns="0" tIns="0" rIns="0" bIns="0" anchor="t">
             <a:noAutofit/>
           </a:bodyPr>
           <a:lstStyle xmlns:a="http://schemas.openxmlformats.org/drawingml/2006/main"/>
@@ -3060,56 +3296,152 @@
             <a:pPr>
               <a:defRPr sz="1950" b="0">
                 <a:solidFill>
-                  <a:srgbClr val="42473D"/>
+                  <a:srgbClr val="687572"/>
                 </a:solidFill>
-                <a:latin typeface="Arial"/>
-                <a:ea typeface="Arial"/>
-                <a:cs typeface="Arial"/>
+                <a:latin typeface="DejaVu Sans"/>
+                <a:ea typeface="DejaVu Sans"/>
+                <a:cs typeface="DejaVu Sans"/>
               </a:defRPr>
             </a:pPr>
             <a:r>
               <a:rPr sz="1950" b="0">
                 <a:solidFill>
-                  <a:srgbClr val="42473D"/>
+                  <a:srgbClr val="687572"/>
                 </a:solidFill>
-                <a:latin typeface="Arial"/>
-                <a:ea typeface="Arial"/>
-                <a:cs typeface="Arial"/>
+                <a:latin typeface="DejaVu Sans"/>
+                <a:ea typeface="DejaVu Sans"/>
+                <a:cs typeface="DejaVu Sans"/>
               </a:rPr>
-              <a:t>Last lesson</a:t>
+              <a:t>[Your prompt]</a:t>
             </a:r>
           </a:p>
+        </p:txBody>
+      </p:sp>
+      <p:sp>
+        <p:nvSpPr>
+          <p:cNvPr id="11" name="">
+            <a:extLst xmlns:a="http://schemas.openxmlformats.org/drawingml/2006/main">
+              <a:ext uri="{FF2B5EF4-FFF2-40B4-BE49-F238E27FC236}">
+                <a16:creationId xmlns:a16="http://schemas.microsoft.com/office/drawing/2014/main" id="{B98740A1-0534-4588-81A9-7E0E4C92A13F}"/>
+              </a:ext>
+            </a:extLst>
+          </p:cNvPr>
+          <p:cNvSpPr>
+            <a:spLocks xmlns:a="http://schemas.openxmlformats.org/drawingml/2006/main" noGrp="1"/>
+          </p:cNvSpPr>
+          <p:nvPr/>
+        </p:nvSpPr>
+        <p:spPr>
+          <a:xfrm xmlns:a="http://schemas.openxmlformats.org/drawingml/2006/main">
+            <a:off x="4324350" y="2247900"/>
+            <a:ext cx="3543300" cy="1600200"/>
+          </a:xfrm>
+          <a:prstGeom xmlns:a="http://schemas.openxmlformats.org/drawingml/2006/main" prst="rect">
+            <a:avLst/>
+          </a:prstGeom>
+          <a:solidFill xmlns:a="http://schemas.openxmlformats.org/drawingml/2006/main">
+            <a:srgbClr val="EAF1EC"/>
+          </a:solidFill>
+          <a:ln xmlns:a="http://schemas.openxmlformats.org/drawingml/2006/main" w="9525">
+            <a:solidFill>
+              <a:srgbClr val="D4DFDB"/>
+            </a:solidFill>
+          </a:ln>
+        </p:spPr>
+      </p:sp>
+      <p:sp>
+        <p:nvSpPr>
+          <p:cNvPr id="12" name="">
+            <a:extLst xmlns:a="http://schemas.openxmlformats.org/drawingml/2006/main">
+              <a:ext uri="{FF2B5EF4-FFF2-40B4-BE49-F238E27FC236}">
+                <a16:creationId xmlns:a16="http://schemas.microsoft.com/office/drawing/2014/main" id="{5724A529-03F8-4624-A61C-74FE9140D763}"/>
+              </a:ext>
+            </a:extLst>
+          </p:cNvPr>
+          <p:cNvSpPr>
+            <a:spLocks xmlns:a="http://schemas.openxmlformats.org/drawingml/2006/main" noGrp="1"/>
+          </p:cNvSpPr>
+          <p:nvPr/>
+        </p:nvSpPr>
+        <p:spPr>
+          <a:xfrm xmlns:a="http://schemas.openxmlformats.org/drawingml/2006/main">
+            <a:off x="4514850" y="2419350"/>
+            <a:ext cx="381000" cy="381000"/>
+          </a:xfrm>
+          <a:prstGeom xmlns:a="http://schemas.openxmlformats.org/drawingml/2006/main" prst="ellipse">
+            <a:avLst/>
+          </a:prstGeom>
+          <a:solidFill xmlns:a="http://schemas.openxmlformats.org/drawingml/2006/main">
+            <a:srgbClr val="FFFFFF"/>
+          </a:solidFill>
+          <a:ln xmlns:a="http://schemas.openxmlformats.org/drawingml/2006/main" w="0">
+            <a:noFill/>
+          </a:ln>
+        </p:spPr>
+      </p:sp>
+      <p:sp>
+        <p:nvSpPr>
+          <p:cNvPr id="13" name="">
+            <a:extLst xmlns:a="http://schemas.openxmlformats.org/drawingml/2006/main">
+              <a:ext uri="{FF2B5EF4-FFF2-40B4-BE49-F238E27FC236}">
+                <a16:creationId xmlns:a16="http://schemas.microsoft.com/office/drawing/2014/main" id="{BFDDB28F-55DF-4F70-AD81-49B06A36416F}"/>
+              </a:ext>
+            </a:extLst>
+          </p:cNvPr>
+          <p:cNvSpPr>
+            <a:spLocks xmlns:a="http://schemas.openxmlformats.org/drawingml/2006/main" noGrp="1"/>
+          </p:cNvSpPr>
+          <p:nvPr/>
+        </p:nvSpPr>
+        <p:spPr>
+          <a:xfrm xmlns:a="http://schemas.openxmlformats.org/drawingml/2006/main">
+            <a:off x="4572000" y="2486025"/>
+            <a:ext cx="342900" cy="285750"/>
+          </a:xfrm>
+          <a:prstGeom xmlns:a="http://schemas.openxmlformats.org/drawingml/2006/main" prst="rect">
+            <a:avLst/>
+          </a:prstGeom>
+          <a:noFill xmlns:a="http://schemas.openxmlformats.org/drawingml/2006/main"/>
+          <a:ln xmlns:a="http://schemas.openxmlformats.org/drawingml/2006/main" w="0">
+            <a:noFill/>
+          </a:ln>
+        </p:spPr>
+        <p:txBody>
+          <a:bodyPr xmlns:a="http://schemas.openxmlformats.org/drawingml/2006/main" lIns="0" tIns="0" rIns="0" bIns="0" anchor="t">
+            <a:noAutofit/>
+          </a:bodyPr>
+          <a:lstStyle xmlns:a="http://schemas.openxmlformats.org/drawingml/2006/main"/>
           <a:p xmlns:a="http://schemas.openxmlformats.org/drawingml/2006/main">
             <a:pPr>
-              <a:defRPr sz="1950" b="0">
+              <a:defRPr sz="1350" b="1">
                 <a:solidFill>
-                  <a:srgbClr val="42473D"/>
+                  <a:srgbClr val="263C3A"/>
                 </a:solidFill>
-                <a:latin typeface="Arial"/>
-                <a:ea typeface="Arial"/>
-                <a:cs typeface="Arial"/>
+                <a:latin typeface="DejaVu Sans"/>
+                <a:ea typeface="DejaVu Sans"/>
+                <a:cs typeface="DejaVu Sans"/>
               </a:defRPr>
             </a:pPr>
             <a:r>
-              <a:rPr sz="1950" b="0">
+              <a:rPr sz="1350" b="1">
                 <a:solidFill>
-                  <a:srgbClr val="42473D"/>
+                  <a:srgbClr val="263C3A"/>
                 </a:solidFill>
-                <a:latin typeface="Arial"/>
-                <a:ea typeface="Arial"/>
-                <a:cs typeface="Arial"/>
+                <a:latin typeface="DejaVu Sans"/>
+                <a:ea typeface="DejaVu Sans"/>
+                <a:cs typeface="DejaVu Sans"/>
               </a:rPr>
-              <a:t>[Add a prompt]</a:t>
+              <a:t>02</a:t>
             </a:r>
           </a:p>
         </p:txBody>
       </p:sp>
       <p:sp>
         <p:nvSpPr>
-          <p:cNvPr id="5" name="">
-            <a:extLst xmlns:a="http://schemas.openxmlformats.org/drawingml/2006/main">
-              <a:ext uri="{FF2B5EF4-FFF2-40B4-BE49-F238E27FC236}">
-                <a16:creationId xmlns:a16="http://schemas.microsoft.com/office/drawing/2014/main" id="{EB9233B5-0EEA-4954-B6C1-56B8ABD4DC76}"/>
+          <p:cNvPr id="14" name="">
+            <a:extLst xmlns:a="http://schemas.openxmlformats.org/drawingml/2006/main">
+              <a:ext uri="{FF2B5EF4-FFF2-40B4-BE49-F238E27FC236}">
+                <a16:creationId xmlns:a16="http://schemas.microsoft.com/office/drawing/2014/main" id="{DC602A45-578C-414D-901F-51B70F4377B1}"/>
               </a:ext>
             </a:extLst>
           </p:cNvPr>
@@ -3120,21 +3452,76 @@
         </p:nvSpPr>
         <p:spPr>
           <a:xfrm xmlns:a="http://schemas.openxmlformats.org/drawingml/2006/main">
-            <a:off x="4324350" y="2190750"/>
-            <a:ext cx="3543300" cy="1581150"/>
+            <a:off x="5067300" y="2466975"/>
+            <a:ext cx="2609850" cy="428625"/>
           </a:xfrm>
           <a:prstGeom xmlns:a="http://schemas.openxmlformats.org/drawingml/2006/main" prst="rect">
             <a:avLst/>
           </a:prstGeom>
           <a:noFill xmlns:a="http://schemas.openxmlformats.org/drawingml/2006/main"/>
-          <a:ln xmlns:a="http://schemas.openxmlformats.org/drawingml/2006/main" w="9525">
-            <a:solidFill>
-              <a:srgbClr val="CBD0C4"/>
-            </a:solidFill>
+          <a:ln xmlns:a="http://schemas.openxmlformats.org/drawingml/2006/main" w="0">
+            <a:noFill/>
           </a:ln>
         </p:spPr>
         <p:txBody>
-          <a:bodyPr xmlns:a="http://schemas.openxmlformats.org/drawingml/2006/main" lIns="142875" tIns="114300" rIns="142875" bIns="0" anchor="t">
+          <a:bodyPr xmlns:a="http://schemas.openxmlformats.org/drawingml/2006/main" lIns="0" tIns="0" rIns="0" bIns="0" anchor="t">
+            <a:noAutofit/>
+          </a:bodyPr>
+          <a:lstStyle xmlns:a="http://schemas.openxmlformats.org/drawingml/2006/main"/>
+          <a:p xmlns:a="http://schemas.openxmlformats.org/drawingml/2006/main">
+            <a:pPr>
+              <a:defRPr sz="1725" b="1">
+                <a:solidFill>
+                  <a:srgbClr val="263C3A"/>
+                </a:solidFill>
+                <a:latin typeface="DejaVu Sans"/>
+                <a:ea typeface="DejaVu Sans"/>
+                <a:cs typeface="DejaVu Sans"/>
+              </a:defRPr>
+            </a:pPr>
+            <a:r>
+              <a:rPr sz="1725" b="1">
+                <a:solidFill>
+                  <a:srgbClr val="263C3A"/>
+                </a:solidFill>
+                <a:latin typeface="DejaVu Sans"/>
+                <a:ea typeface="DejaVu Sans"/>
+                <a:cs typeface="DejaVu Sans"/>
+              </a:rPr>
+              <a:t>Last week</a:t>
+            </a:r>
+          </a:p>
+        </p:txBody>
+      </p:sp>
+      <p:sp>
+        <p:nvSpPr>
+          <p:cNvPr id="15" name="">
+            <a:extLst xmlns:a="http://schemas.openxmlformats.org/drawingml/2006/main">
+              <a:ext uri="{FF2B5EF4-FFF2-40B4-BE49-F238E27FC236}">
+                <a16:creationId xmlns:a16="http://schemas.microsoft.com/office/drawing/2014/main" id="{3FACD73E-1DFC-401F-AA94-D30551DF81C9}"/>
+              </a:ext>
+            </a:extLst>
+          </p:cNvPr>
+          <p:cNvSpPr>
+            <a:spLocks xmlns:a="http://schemas.openxmlformats.org/drawingml/2006/main" noGrp="1"/>
+          </p:cNvSpPr>
+          <p:nvPr/>
+        </p:nvSpPr>
+        <p:spPr>
+          <a:xfrm xmlns:a="http://schemas.openxmlformats.org/drawingml/2006/main">
+            <a:off x="4533900" y="2990850"/>
+            <a:ext cx="3124200" cy="695325"/>
+          </a:xfrm>
+          <a:prstGeom xmlns:a="http://schemas.openxmlformats.org/drawingml/2006/main" prst="rect">
+            <a:avLst/>
+          </a:prstGeom>
+          <a:noFill xmlns:a="http://schemas.openxmlformats.org/drawingml/2006/main"/>
+          <a:ln xmlns:a="http://schemas.openxmlformats.org/drawingml/2006/main" w="0">
+            <a:noFill/>
+          </a:ln>
+        </p:spPr>
+        <p:txBody>
+          <a:bodyPr xmlns:a="http://schemas.openxmlformats.org/drawingml/2006/main" lIns="0" tIns="0" rIns="0" bIns="0" anchor="t">
             <a:noAutofit/>
           </a:bodyPr>
           <a:lstStyle xmlns:a="http://schemas.openxmlformats.org/drawingml/2006/main"/>
@@ -3142,56 +3529,152 @@
             <a:pPr>
               <a:defRPr sz="1950" b="0">
                 <a:solidFill>
-                  <a:srgbClr val="42473D"/>
+                  <a:srgbClr val="687572"/>
                 </a:solidFill>
-                <a:latin typeface="Arial"/>
-                <a:ea typeface="Arial"/>
-                <a:cs typeface="Arial"/>
+                <a:latin typeface="DejaVu Sans"/>
+                <a:ea typeface="DejaVu Sans"/>
+                <a:cs typeface="DejaVu Sans"/>
               </a:defRPr>
             </a:pPr>
             <a:r>
               <a:rPr sz="1950" b="0">
                 <a:solidFill>
-                  <a:srgbClr val="42473D"/>
+                  <a:srgbClr val="687572"/>
                 </a:solidFill>
-                <a:latin typeface="Arial"/>
-                <a:ea typeface="Arial"/>
-                <a:cs typeface="Arial"/>
+                <a:latin typeface="DejaVu Sans"/>
+                <a:ea typeface="DejaVu Sans"/>
+                <a:cs typeface="DejaVu Sans"/>
               </a:rPr>
-              <a:t>Last week</a:t>
+              <a:t>[Your prompt]</a:t>
             </a:r>
           </a:p>
+        </p:txBody>
+      </p:sp>
+      <p:sp>
+        <p:nvSpPr>
+          <p:cNvPr id="16" name="">
+            <a:extLst xmlns:a="http://schemas.openxmlformats.org/drawingml/2006/main">
+              <a:ext uri="{FF2B5EF4-FFF2-40B4-BE49-F238E27FC236}">
+                <a16:creationId xmlns:a16="http://schemas.microsoft.com/office/drawing/2014/main" id="{61E870F7-7D48-4F8C-A6B2-964C47C14D65}"/>
+              </a:ext>
+            </a:extLst>
+          </p:cNvPr>
+          <p:cNvSpPr>
+            <a:spLocks xmlns:a="http://schemas.openxmlformats.org/drawingml/2006/main" noGrp="1"/>
+          </p:cNvSpPr>
+          <p:nvPr/>
+        </p:nvSpPr>
+        <p:spPr>
+          <a:xfrm xmlns:a="http://schemas.openxmlformats.org/drawingml/2006/main">
+            <a:off x="8039100" y="2247900"/>
+            <a:ext cx="3543300" cy="1600200"/>
+          </a:xfrm>
+          <a:prstGeom xmlns:a="http://schemas.openxmlformats.org/drawingml/2006/main" prst="rect">
+            <a:avLst/>
+          </a:prstGeom>
+          <a:solidFill xmlns:a="http://schemas.openxmlformats.org/drawingml/2006/main">
+            <a:srgbClr val="EDF2F5"/>
+          </a:solidFill>
+          <a:ln xmlns:a="http://schemas.openxmlformats.org/drawingml/2006/main" w="9525">
+            <a:solidFill>
+              <a:srgbClr val="D4DFDB"/>
+            </a:solidFill>
+          </a:ln>
+        </p:spPr>
+      </p:sp>
+      <p:sp>
+        <p:nvSpPr>
+          <p:cNvPr id="17" name="">
+            <a:extLst xmlns:a="http://schemas.openxmlformats.org/drawingml/2006/main">
+              <a:ext uri="{FF2B5EF4-FFF2-40B4-BE49-F238E27FC236}">
+                <a16:creationId xmlns:a16="http://schemas.microsoft.com/office/drawing/2014/main" id="{4166F0DD-FDCD-4D65-AF43-B0D095843422}"/>
+              </a:ext>
+            </a:extLst>
+          </p:cNvPr>
+          <p:cNvSpPr>
+            <a:spLocks xmlns:a="http://schemas.openxmlformats.org/drawingml/2006/main" noGrp="1"/>
+          </p:cNvSpPr>
+          <p:nvPr/>
+        </p:nvSpPr>
+        <p:spPr>
+          <a:xfrm xmlns:a="http://schemas.openxmlformats.org/drawingml/2006/main">
+            <a:off x="8229600" y="2419350"/>
+            <a:ext cx="381000" cy="381000"/>
+          </a:xfrm>
+          <a:prstGeom xmlns:a="http://schemas.openxmlformats.org/drawingml/2006/main" prst="ellipse">
+            <a:avLst/>
+          </a:prstGeom>
+          <a:solidFill xmlns:a="http://schemas.openxmlformats.org/drawingml/2006/main">
+            <a:srgbClr val="FFFFFF"/>
+          </a:solidFill>
+          <a:ln xmlns:a="http://schemas.openxmlformats.org/drawingml/2006/main" w="0">
+            <a:noFill/>
+          </a:ln>
+        </p:spPr>
+      </p:sp>
+      <p:sp>
+        <p:nvSpPr>
+          <p:cNvPr id="18" name="">
+            <a:extLst xmlns:a="http://schemas.openxmlformats.org/drawingml/2006/main">
+              <a:ext uri="{FF2B5EF4-FFF2-40B4-BE49-F238E27FC236}">
+                <a16:creationId xmlns:a16="http://schemas.microsoft.com/office/drawing/2014/main" id="{14B0C339-1BF4-495C-87DA-7B5A94DF7644}"/>
+              </a:ext>
+            </a:extLst>
+          </p:cNvPr>
+          <p:cNvSpPr>
+            <a:spLocks xmlns:a="http://schemas.openxmlformats.org/drawingml/2006/main" noGrp="1"/>
+          </p:cNvSpPr>
+          <p:nvPr/>
+        </p:nvSpPr>
+        <p:spPr>
+          <a:xfrm xmlns:a="http://schemas.openxmlformats.org/drawingml/2006/main">
+            <a:off x="8286750" y="2486025"/>
+            <a:ext cx="342900" cy="285750"/>
+          </a:xfrm>
+          <a:prstGeom xmlns:a="http://schemas.openxmlformats.org/drawingml/2006/main" prst="rect">
+            <a:avLst/>
+          </a:prstGeom>
+          <a:noFill xmlns:a="http://schemas.openxmlformats.org/drawingml/2006/main"/>
+          <a:ln xmlns:a="http://schemas.openxmlformats.org/drawingml/2006/main" w="0">
+            <a:noFill/>
+          </a:ln>
+        </p:spPr>
+        <p:txBody>
+          <a:bodyPr xmlns:a="http://schemas.openxmlformats.org/drawingml/2006/main" lIns="0" tIns="0" rIns="0" bIns="0" anchor="t">
+            <a:noAutofit/>
+          </a:bodyPr>
+          <a:lstStyle xmlns:a="http://schemas.openxmlformats.org/drawingml/2006/main"/>
           <a:p xmlns:a="http://schemas.openxmlformats.org/drawingml/2006/main">
             <a:pPr>
-              <a:defRPr sz="1950" b="0">
+              <a:defRPr sz="1350" b="1">
                 <a:solidFill>
-                  <a:srgbClr val="42473D"/>
+                  <a:srgbClr val="263C3A"/>
                 </a:solidFill>
-                <a:latin typeface="Arial"/>
-                <a:ea typeface="Arial"/>
-                <a:cs typeface="Arial"/>
+                <a:latin typeface="DejaVu Sans"/>
+                <a:ea typeface="DejaVu Sans"/>
+                <a:cs typeface="DejaVu Sans"/>
               </a:defRPr>
             </a:pPr>
             <a:r>
-              <a:rPr sz="1950" b="0">
+              <a:rPr sz="1350" b="1">
                 <a:solidFill>
-                  <a:srgbClr val="42473D"/>
+                  <a:srgbClr val="263C3A"/>
                 </a:solidFill>
-                <a:latin typeface="Arial"/>
-                <a:ea typeface="Arial"/>
-                <a:cs typeface="Arial"/>
+                <a:latin typeface="DejaVu Sans"/>
+                <a:ea typeface="DejaVu Sans"/>
+                <a:cs typeface="DejaVu Sans"/>
               </a:rPr>
-              <a:t>[Add a prompt]</a:t>
+              <a:t>03</a:t>
             </a:r>
           </a:p>
         </p:txBody>
       </p:sp>
       <p:sp>
         <p:nvSpPr>
-          <p:cNvPr id="6" name="">
-            <a:extLst xmlns:a="http://schemas.openxmlformats.org/drawingml/2006/main">
-              <a:ext uri="{FF2B5EF4-FFF2-40B4-BE49-F238E27FC236}">
-                <a16:creationId xmlns:a16="http://schemas.microsoft.com/office/drawing/2014/main" id="{F25AEEB2-D09E-4543-82E0-CBEF14DE65C0}"/>
+          <p:cNvPr id="19" name="">
+            <a:extLst xmlns:a="http://schemas.openxmlformats.org/drawingml/2006/main">
+              <a:ext uri="{FF2B5EF4-FFF2-40B4-BE49-F238E27FC236}">
+                <a16:creationId xmlns:a16="http://schemas.microsoft.com/office/drawing/2014/main" id="{C1E3A553-6189-4566-92C3-A5551CD3F12D}"/>
               </a:ext>
             </a:extLst>
           </p:cNvPr>
@@ -3202,21 +3685,76 @@
         </p:nvSpPr>
         <p:spPr>
           <a:xfrm xmlns:a="http://schemas.openxmlformats.org/drawingml/2006/main">
-            <a:off x="8039100" y="2190750"/>
-            <a:ext cx="3543300" cy="1581150"/>
+            <a:off x="8782050" y="2466975"/>
+            <a:ext cx="2609850" cy="428625"/>
           </a:xfrm>
           <a:prstGeom xmlns:a="http://schemas.openxmlformats.org/drawingml/2006/main" prst="rect">
             <a:avLst/>
           </a:prstGeom>
           <a:noFill xmlns:a="http://schemas.openxmlformats.org/drawingml/2006/main"/>
-          <a:ln xmlns:a="http://schemas.openxmlformats.org/drawingml/2006/main" w="9525">
-            <a:solidFill>
-              <a:srgbClr val="CBD0C4"/>
-            </a:solidFill>
+          <a:ln xmlns:a="http://schemas.openxmlformats.org/drawingml/2006/main" w="0">
+            <a:noFill/>
           </a:ln>
         </p:spPr>
         <p:txBody>
-          <a:bodyPr xmlns:a="http://schemas.openxmlformats.org/drawingml/2006/main" lIns="142875" tIns="114300" rIns="142875" bIns="0" anchor="t">
+          <a:bodyPr xmlns:a="http://schemas.openxmlformats.org/drawingml/2006/main" lIns="0" tIns="0" rIns="0" bIns="0" anchor="t">
+            <a:noAutofit/>
+          </a:bodyPr>
+          <a:lstStyle xmlns:a="http://schemas.openxmlformats.org/drawingml/2006/main"/>
+          <a:p xmlns:a="http://schemas.openxmlformats.org/drawingml/2006/main">
+            <a:pPr>
+              <a:defRPr sz="1725" b="1">
+                <a:solidFill>
+                  <a:srgbClr val="263C3A"/>
+                </a:solidFill>
+                <a:latin typeface="DejaVu Sans"/>
+                <a:ea typeface="DejaVu Sans"/>
+                <a:cs typeface="DejaVu Sans"/>
+              </a:defRPr>
+            </a:pPr>
+            <a:r>
+              <a:rPr sz="1725" b="1">
+                <a:solidFill>
+                  <a:srgbClr val="263C3A"/>
+                </a:solidFill>
+                <a:latin typeface="DejaVu Sans"/>
+                <a:ea typeface="DejaVu Sans"/>
+                <a:cs typeface="DejaVu Sans"/>
+              </a:rPr>
+              <a:t>Earlier learning</a:t>
+            </a:r>
+          </a:p>
+        </p:txBody>
+      </p:sp>
+      <p:sp>
+        <p:nvSpPr>
+          <p:cNvPr id="20" name="">
+            <a:extLst xmlns:a="http://schemas.openxmlformats.org/drawingml/2006/main">
+              <a:ext uri="{FF2B5EF4-FFF2-40B4-BE49-F238E27FC236}">
+                <a16:creationId xmlns:a16="http://schemas.microsoft.com/office/drawing/2014/main" id="{4812711C-2662-4956-9190-0CDB2E0AC7CD}"/>
+              </a:ext>
+            </a:extLst>
+          </p:cNvPr>
+          <p:cNvSpPr>
+            <a:spLocks xmlns:a="http://schemas.openxmlformats.org/drawingml/2006/main" noGrp="1"/>
+          </p:cNvSpPr>
+          <p:nvPr/>
+        </p:nvSpPr>
+        <p:spPr>
+          <a:xfrm xmlns:a="http://schemas.openxmlformats.org/drawingml/2006/main">
+            <a:off x="8248650" y="2990850"/>
+            <a:ext cx="3124200" cy="695325"/>
+          </a:xfrm>
+          <a:prstGeom xmlns:a="http://schemas.openxmlformats.org/drawingml/2006/main" prst="rect">
+            <a:avLst/>
+          </a:prstGeom>
+          <a:noFill xmlns:a="http://schemas.openxmlformats.org/drawingml/2006/main"/>
+          <a:ln xmlns:a="http://schemas.openxmlformats.org/drawingml/2006/main" w="0">
+            <a:noFill/>
+          </a:ln>
+        </p:spPr>
+        <p:txBody>
+          <a:bodyPr xmlns:a="http://schemas.openxmlformats.org/drawingml/2006/main" lIns="0" tIns="0" rIns="0" bIns="0" anchor="t">
             <a:noAutofit/>
           </a:bodyPr>
           <a:lstStyle xmlns:a="http://schemas.openxmlformats.org/drawingml/2006/main"/>
@@ -3224,56 +3762,152 @@
             <a:pPr>
               <a:defRPr sz="1950" b="0">
                 <a:solidFill>
-                  <a:srgbClr val="42473D"/>
+                  <a:srgbClr val="687572"/>
                 </a:solidFill>
-                <a:latin typeface="Arial"/>
-                <a:ea typeface="Arial"/>
-                <a:cs typeface="Arial"/>
+                <a:latin typeface="DejaVu Sans"/>
+                <a:ea typeface="DejaVu Sans"/>
+                <a:cs typeface="DejaVu Sans"/>
               </a:defRPr>
             </a:pPr>
             <a:r>
               <a:rPr sz="1950" b="0">
                 <a:solidFill>
-                  <a:srgbClr val="42473D"/>
+                  <a:srgbClr val="687572"/>
                 </a:solidFill>
-                <a:latin typeface="Arial"/>
-                <a:ea typeface="Arial"/>
-                <a:cs typeface="Arial"/>
+                <a:latin typeface="DejaVu Sans"/>
+                <a:ea typeface="DejaVu Sans"/>
+                <a:cs typeface="DejaVu Sans"/>
               </a:rPr>
-              <a:t>Earlier learning</a:t>
+              <a:t>[Your prompt]</a:t>
             </a:r>
           </a:p>
+        </p:txBody>
+      </p:sp>
+      <p:sp>
+        <p:nvSpPr>
+          <p:cNvPr id="21" name="">
+            <a:extLst xmlns:a="http://schemas.openxmlformats.org/drawingml/2006/main">
+              <a:ext uri="{FF2B5EF4-FFF2-40B4-BE49-F238E27FC236}">
+                <a16:creationId xmlns:a16="http://schemas.microsoft.com/office/drawing/2014/main" id="{6AF2C80F-1FD4-41E2-8F6A-1809347F72C7}"/>
+              </a:ext>
+            </a:extLst>
+          </p:cNvPr>
+          <p:cNvSpPr>
+            <a:spLocks xmlns:a="http://schemas.openxmlformats.org/drawingml/2006/main" noGrp="1"/>
+          </p:cNvSpPr>
+          <p:nvPr/>
+        </p:nvSpPr>
+        <p:spPr>
+          <a:xfrm xmlns:a="http://schemas.openxmlformats.org/drawingml/2006/main">
+            <a:off x="609600" y="4019550"/>
+            <a:ext cx="3543300" cy="1600200"/>
+          </a:xfrm>
+          <a:prstGeom xmlns:a="http://schemas.openxmlformats.org/drawingml/2006/main" prst="rect">
+            <a:avLst/>
+          </a:prstGeom>
+          <a:solidFill xmlns:a="http://schemas.openxmlformats.org/drawingml/2006/main">
+            <a:srgbClr val="EAF1EC"/>
+          </a:solidFill>
+          <a:ln xmlns:a="http://schemas.openxmlformats.org/drawingml/2006/main" w="9525">
+            <a:solidFill>
+              <a:srgbClr val="D4DFDB"/>
+            </a:solidFill>
+          </a:ln>
+        </p:spPr>
+      </p:sp>
+      <p:sp>
+        <p:nvSpPr>
+          <p:cNvPr id="22" name="">
+            <a:extLst xmlns:a="http://schemas.openxmlformats.org/drawingml/2006/main">
+              <a:ext uri="{FF2B5EF4-FFF2-40B4-BE49-F238E27FC236}">
+                <a16:creationId xmlns:a16="http://schemas.microsoft.com/office/drawing/2014/main" id="{79FCC030-87CC-406E-BDC7-B274F5ACB8D2}"/>
+              </a:ext>
+            </a:extLst>
+          </p:cNvPr>
+          <p:cNvSpPr>
+            <a:spLocks xmlns:a="http://schemas.openxmlformats.org/drawingml/2006/main" noGrp="1"/>
+          </p:cNvSpPr>
+          <p:nvPr/>
+        </p:nvSpPr>
+        <p:spPr>
+          <a:xfrm xmlns:a="http://schemas.openxmlformats.org/drawingml/2006/main">
+            <a:off x="800100" y="4191000"/>
+            <a:ext cx="381000" cy="381000"/>
+          </a:xfrm>
+          <a:prstGeom xmlns:a="http://schemas.openxmlformats.org/drawingml/2006/main" prst="ellipse">
+            <a:avLst/>
+          </a:prstGeom>
+          <a:solidFill xmlns:a="http://schemas.openxmlformats.org/drawingml/2006/main">
+            <a:srgbClr val="FFFFFF"/>
+          </a:solidFill>
+          <a:ln xmlns:a="http://schemas.openxmlformats.org/drawingml/2006/main" w="0">
+            <a:noFill/>
+          </a:ln>
+        </p:spPr>
+      </p:sp>
+      <p:sp>
+        <p:nvSpPr>
+          <p:cNvPr id="23" name="">
+            <a:extLst xmlns:a="http://schemas.openxmlformats.org/drawingml/2006/main">
+              <a:ext uri="{FF2B5EF4-FFF2-40B4-BE49-F238E27FC236}">
+                <a16:creationId xmlns:a16="http://schemas.microsoft.com/office/drawing/2014/main" id="{BF49F024-CB00-4BAC-9328-309A27187A06}"/>
+              </a:ext>
+            </a:extLst>
+          </p:cNvPr>
+          <p:cNvSpPr>
+            <a:spLocks xmlns:a="http://schemas.openxmlformats.org/drawingml/2006/main" noGrp="1"/>
+          </p:cNvSpPr>
+          <p:nvPr/>
+        </p:nvSpPr>
+        <p:spPr>
+          <a:xfrm xmlns:a="http://schemas.openxmlformats.org/drawingml/2006/main">
+            <a:off x="857250" y="4257675"/>
+            <a:ext cx="342900" cy="285750"/>
+          </a:xfrm>
+          <a:prstGeom xmlns:a="http://schemas.openxmlformats.org/drawingml/2006/main" prst="rect">
+            <a:avLst/>
+          </a:prstGeom>
+          <a:noFill xmlns:a="http://schemas.openxmlformats.org/drawingml/2006/main"/>
+          <a:ln xmlns:a="http://schemas.openxmlformats.org/drawingml/2006/main" w="0">
+            <a:noFill/>
+          </a:ln>
+        </p:spPr>
+        <p:txBody>
+          <a:bodyPr xmlns:a="http://schemas.openxmlformats.org/drawingml/2006/main" lIns="0" tIns="0" rIns="0" bIns="0" anchor="t">
+            <a:noAutofit/>
+          </a:bodyPr>
+          <a:lstStyle xmlns:a="http://schemas.openxmlformats.org/drawingml/2006/main"/>
           <a:p xmlns:a="http://schemas.openxmlformats.org/drawingml/2006/main">
             <a:pPr>
-              <a:defRPr sz="1950" b="0">
+              <a:defRPr sz="1350" b="1">
                 <a:solidFill>
-                  <a:srgbClr val="42473D"/>
+                  <a:srgbClr val="263C3A"/>
                 </a:solidFill>
-                <a:latin typeface="Arial"/>
-                <a:ea typeface="Arial"/>
-                <a:cs typeface="Arial"/>
+                <a:latin typeface="DejaVu Sans"/>
+                <a:ea typeface="DejaVu Sans"/>
+                <a:cs typeface="DejaVu Sans"/>
               </a:defRPr>
             </a:pPr>
             <a:r>
-              <a:rPr sz="1950" b="0">
+              <a:rPr sz="1350" b="1">
                 <a:solidFill>
-                  <a:srgbClr val="42473D"/>
+                  <a:srgbClr val="263C3A"/>
                 </a:solidFill>
-                <a:latin typeface="Arial"/>
-                <a:ea typeface="Arial"/>
-                <a:cs typeface="Arial"/>
+                <a:latin typeface="DejaVu Sans"/>
+                <a:ea typeface="DejaVu Sans"/>
+                <a:cs typeface="DejaVu Sans"/>
               </a:rPr>
-              <a:t>[Add a prompt]</a:t>
+              <a:t>04</a:t>
             </a:r>
           </a:p>
         </p:txBody>
       </p:sp>
       <p:sp>
         <p:nvSpPr>
-          <p:cNvPr id="7" name="">
-            <a:extLst xmlns:a="http://schemas.openxmlformats.org/drawingml/2006/main">
-              <a:ext uri="{FF2B5EF4-FFF2-40B4-BE49-F238E27FC236}">
-                <a16:creationId xmlns:a16="http://schemas.microsoft.com/office/drawing/2014/main" id="{75058B66-C270-46DE-9783-61991EC02169}"/>
+          <p:cNvPr id="24" name="">
+            <a:extLst xmlns:a="http://schemas.openxmlformats.org/drawingml/2006/main">
+              <a:ext uri="{FF2B5EF4-FFF2-40B4-BE49-F238E27FC236}">
+                <a16:creationId xmlns:a16="http://schemas.microsoft.com/office/drawing/2014/main" id="{BE8A5D35-0D04-4FB5-B305-2F6C08ACF67C}"/>
               </a:ext>
             </a:extLst>
           </p:cNvPr>
@@ -3284,21 +3918,76 @@
         </p:nvSpPr>
         <p:spPr>
           <a:xfrm xmlns:a="http://schemas.openxmlformats.org/drawingml/2006/main">
-            <a:off x="609600" y="3943350"/>
-            <a:ext cx="3543300" cy="1581150"/>
+            <a:off x="1352550" y="4238625"/>
+            <a:ext cx="2609850" cy="428625"/>
           </a:xfrm>
           <a:prstGeom xmlns:a="http://schemas.openxmlformats.org/drawingml/2006/main" prst="rect">
             <a:avLst/>
           </a:prstGeom>
           <a:noFill xmlns:a="http://schemas.openxmlformats.org/drawingml/2006/main"/>
-          <a:ln xmlns:a="http://schemas.openxmlformats.org/drawingml/2006/main" w="9525">
-            <a:solidFill>
-              <a:srgbClr val="CBD0C4"/>
-            </a:solidFill>
+          <a:ln xmlns:a="http://schemas.openxmlformats.org/drawingml/2006/main" w="0">
+            <a:noFill/>
           </a:ln>
         </p:spPr>
         <p:txBody>
-          <a:bodyPr xmlns:a="http://schemas.openxmlformats.org/drawingml/2006/main" lIns="142875" tIns="114300" rIns="142875" bIns="0" anchor="t">
+          <a:bodyPr xmlns:a="http://schemas.openxmlformats.org/drawingml/2006/main" lIns="0" tIns="0" rIns="0" bIns="0" anchor="t">
+            <a:noAutofit/>
+          </a:bodyPr>
+          <a:lstStyle xmlns:a="http://schemas.openxmlformats.org/drawingml/2006/main"/>
+          <a:p xmlns:a="http://schemas.openxmlformats.org/drawingml/2006/main">
+            <a:pPr>
+              <a:defRPr sz="1725" b="1">
+                <a:solidFill>
+                  <a:srgbClr val="263C3A"/>
+                </a:solidFill>
+                <a:latin typeface="DejaVu Sans"/>
+                <a:ea typeface="DejaVu Sans"/>
+                <a:cs typeface="DejaVu Sans"/>
+              </a:defRPr>
+            </a:pPr>
+            <a:r>
+              <a:rPr sz="1725" b="1">
+                <a:solidFill>
+                  <a:srgbClr val="263C3A"/>
+                </a:solidFill>
+                <a:latin typeface="DejaVu Sans"/>
+                <a:ea typeface="DejaVu Sans"/>
+                <a:cs typeface="DejaVu Sans"/>
+              </a:rPr>
+              <a:t>Last lesson</a:t>
+            </a:r>
+          </a:p>
+        </p:txBody>
+      </p:sp>
+      <p:sp>
+        <p:nvSpPr>
+          <p:cNvPr id="25" name="">
+            <a:extLst xmlns:a="http://schemas.openxmlformats.org/drawingml/2006/main">
+              <a:ext uri="{FF2B5EF4-FFF2-40B4-BE49-F238E27FC236}">
+                <a16:creationId xmlns:a16="http://schemas.microsoft.com/office/drawing/2014/main" id="{6D0F0702-A163-4403-879E-D577EDDA4DE9}"/>
+              </a:ext>
+            </a:extLst>
+          </p:cNvPr>
+          <p:cNvSpPr>
+            <a:spLocks xmlns:a="http://schemas.openxmlformats.org/drawingml/2006/main" noGrp="1"/>
+          </p:cNvSpPr>
+          <p:nvPr/>
+        </p:nvSpPr>
+        <p:spPr>
+          <a:xfrm xmlns:a="http://schemas.openxmlformats.org/drawingml/2006/main">
+            <a:off x="819150" y="4762500"/>
+            <a:ext cx="3124200" cy="695325"/>
+          </a:xfrm>
+          <a:prstGeom xmlns:a="http://schemas.openxmlformats.org/drawingml/2006/main" prst="rect">
+            <a:avLst/>
+          </a:prstGeom>
+          <a:noFill xmlns:a="http://schemas.openxmlformats.org/drawingml/2006/main"/>
+          <a:ln xmlns:a="http://schemas.openxmlformats.org/drawingml/2006/main" w="0">
+            <a:noFill/>
+          </a:ln>
+        </p:spPr>
+        <p:txBody>
+          <a:bodyPr xmlns:a="http://schemas.openxmlformats.org/drawingml/2006/main" lIns="0" tIns="0" rIns="0" bIns="0" anchor="t">
             <a:noAutofit/>
           </a:bodyPr>
           <a:lstStyle xmlns:a="http://schemas.openxmlformats.org/drawingml/2006/main"/>
@@ -3306,56 +3995,152 @@
             <a:pPr>
               <a:defRPr sz="1950" b="0">
                 <a:solidFill>
-                  <a:srgbClr val="42473D"/>
+                  <a:srgbClr val="687572"/>
                 </a:solidFill>
-                <a:latin typeface="Arial"/>
-                <a:ea typeface="Arial"/>
-                <a:cs typeface="Arial"/>
+                <a:latin typeface="DejaVu Sans"/>
+                <a:ea typeface="DejaVu Sans"/>
+                <a:cs typeface="DejaVu Sans"/>
               </a:defRPr>
             </a:pPr>
             <a:r>
               <a:rPr sz="1950" b="0">
                 <a:solidFill>
-                  <a:srgbClr val="42473D"/>
+                  <a:srgbClr val="687572"/>
                 </a:solidFill>
-                <a:latin typeface="Arial"/>
-                <a:ea typeface="Arial"/>
-                <a:cs typeface="Arial"/>
+                <a:latin typeface="DejaVu Sans"/>
+                <a:ea typeface="DejaVu Sans"/>
+                <a:cs typeface="DejaVu Sans"/>
               </a:rPr>
-              <a:t>Last lesson</a:t>
+              <a:t>[Your prompt]</a:t>
             </a:r>
           </a:p>
+        </p:txBody>
+      </p:sp>
+      <p:sp>
+        <p:nvSpPr>
+          <p:cNvPr id="26" name="">
+            <a:extLst xmlns:a="http://schemas.openxmlformats.org/drawingml/2006/main">
+              <a:ext uri="{FF2B5EF4-FFF2-40B4-BE49-F238E27FC236}">
+                <a16:creationId xmlns:a16="http://schemas.microsoft.com/office/drawing/2014/main" id="{1DFB076D-641F-470C-AFF9-EE349ADDA003}"/>
+              </a:ext>
+            </a:extLst>
+          </p:cNvPr>
+          <p:cNvSpPr>
+            <a:spLocks xmlns:a="http://schemas.openxmlformats.org/drawingml/2006/main" noGrp="1"/>
+          </p:cNvSpPr>
+          <p:nvPr/>
+        </p:nvSpPr>
+        <p:spPr>
+          <a:xfrm xmlns:a="http://schemas.openxmlformats.org/drawingml/2006/main">
+            <a:off x="4324350" y="4019550"/>
+            <a:ext cx="3543300" cy="1600200"/>
+          </a:xfrm>
+          <a:prstGeom xmlns:a="http://schemas.openxmlformats.org/drawingml/2006/main" prst="rect">
+            <a:avLst/>
+          </a:prstGeom>
+          <a:solidFill xmlns:a="http://schemas.openxmlformats.org/drawingml/2006/main">
+            <a:srgbClr val="EDF2F5"/>
+          </a:solidFill>
+          <a:ln xmlns:a="http://schemas.openxmlformats.org/drawingml/2006/main" w="9525">
+            <a:solidFill>
+              <a:srgbClr val="D4DFDB"/>
+            </a:solidFill>
+          </a:ln>
+        </p:spPr>
+      </p:sp>
+      <p:sp>
+        <p:nvSpPr>
+          <p:cNvPr id="27" name="">
+            <a:extLst xmlns:a="http://schemas.openxmlformats.org/drawingml/2006/main">
+              <a:ext uri="{FF2B5EF4-FFF2-40B4-BE49-F238E27FC236}">
+                <a16:creationId xmlns:a16="http://schemas.microsoft.com/office/drawing/2014/main" id="{FD72EBAC-5BD5-47BA-BFB6-FBF8B342FF8F}"/>
+              </a:ext>
+            </a:extLst>
+          </p:cNvPr>
+          <p:cNvSpPr>
+            <a:spLocks xmlns:a="http://schemas.openxmlformats.org/drawingml/2006/main" noGrp="1"/>
+          </p:cNvSpPr>
+          <p:nvPr/>
+        </p:nvSpPr>
+        <p:spPr>
+          <a:xfrm xmlns:a="http://schemas.openxmlformats.org/drawingml/2006/main">
+            <a:off x="4514850" y="4191000"/>
+            <a:ext cx="381000" cy="381000"/>
+          </a:xfrm>
+          <a:prstGeom xmlns:a="http://schemas.openxmlformats.org/drawingml/2006/main" prst="ellipse">
+            <a:avLst/>
+          </a:prstGeom>
+          <a:solidFill xmlns:a="http://schemas.openxmlformats.org/drawingml/2006/main">
+            <a:srgbClr val="FFFFFF"/>
+          </a:solidFill>
+          <a:ln xmlns:a="http://schemas.openxmlformats.org/drawingml/2006/main" w="0">
+            <a:noFill/>
+          </a:ln>
+        </p:spPr>
+      </p:sp>
+      <p:sp>
+        <p:nvSpPr>
+          <p:cNvPr id="28" name="">
+            <a:extLst xmlns:a="http://schemas.openxmlformats.org/drawingml/2006/main">
+              <a:ext uri="{FF2B5EF4-FFF2-40B4-BE49-F238E27FC236}">
+                <a16:creationId xmlns:a16="http://schemas.microsoft.com/office/drawing/2014/main" id="{39004AEE-E385-479D-A944-7CABB83963F9}"/>
+              </a:ext>
+            </a:extLst>
+          </p:cNvPr>
+          <p:cNvSpPr>
+            <a:spLocks xmlns:a="http://schemas.openxmlformats.org/drawingml/2006/main" noGrp="1"/>
+          </p:cNvSpPr>
+          <p:nvPr/>
+        </p:nvSpPr>
+        <p:spPr>
+          <a:xfrm xmlns:a="http://schemas.openxmlformats.org/drawingml/2006/main">
+            <a:off x="4572000" y="4257675"/>
+            <a:ext cx="342900" cy="285750"/>
+          </a:xfrm>
+          <a:prstGeom xmlns:a="http://schemas.openxmlformats.org/drawingml/2006/main" prst="rect">
+            <a:avLst/>
+          </a:prstGeom>
+          <a:noFill xmlns:a="http://schemas.openxmlformats.org/drawingml/2006/main"/>
+          <a:ln xmlns:a="http://schemas.openxmlformats.org/drawingml/2006/main" w="0">
+            <a:noFill/>
+          </a:ln>
+        </p:spPr>
+        <p:txBody>
+          <a:bodyPr xmlns:a="http://schemas.openxmlformats.org/drawingml/2006/main" lIns="0" tIns="0" rIns="0" bIns="0" anchor="t">
+            <a:noAutofit/>
+          </a:bodyPr>
+          <a:lstStyle xmlns:a="http://schemas.openxmlformats.org/drawingml/2006/main"/>
           <a:p xmlns:a="http://schemas.openxmlformats.org/drawingml/2006/main">
             <a:pPr>
-              <a:defRPr sz="1950" b="0">
+              <a:defRPr sz="1350" b="1">
                 <a:solidFill>
-                  <a:srgbClr val="42473D"/>
+                  <a:srgbClr val="263C3A"/>
                 </a:solidFill>
-                <a:latin typeface="Arial"/>
-                <a:ea typeface="Arial"/>
-                <a:cs typeface="Arial"/>
+                <a:latin typeface="DejaVu Sans"/>
+                <a:ea typeface="DejaVu Sans"/>
+                <a:cs typeface="DejaVu Sans"/>
               </a:defRPr>
             </a:pPr>
             <a:r>
-              <a:rPr sz="1950" b="0">
+              <a:rPr sz="1350" b="1">
                 <a:solidFill>
-                  <a:srgbClr val="42473D"/>
+                  <a:srgbClr val="263C3A"/>
                 </a:solidFill>
-                <a:latin typeface="Arial"/>
-                <a:ea typeface="Arial"/>
-                <a:cs typeface="Arial"/>
+                <a:latin typeface="DejaVu Sans"/>
+                <a:ea typeface="DejaVu Sans"/>
+                <a:cs typeface="DejaVu Sans"/>
               </a:rPr>
-              <a:t>[Add a prompt]</a:t>
+              <a:t>05</a:t>
             </a:r>
           </a:p>
         </p:txBody>
       </p:sp>
       <p:sp>
         <p:nvSpPr>
-          <p:cNvPr id="8" name="">
-            <a:extLst xmlns:a="http://schemas.openxmlformats.org/drawingml/2006/main">
-              <a:ext uri="{FF2B5EF4-FFF2-40B4-BE49-F238E27FC236}">
-                <a16:creationId xmlns:a16="http://schemas.microsoft.com/office/drawing/2014/main" id="{08C4AF2D-9A02-4F0E-9191-68C06C17A1AC}"/>
+          <p:cNvPr id="29" name="">
+            <a:extLst xmlns:a="http://schemas.openxmlformats.org/drawingml/2006/main">
+              <a:ext uri="{FF2B5EF4-FFF2-40B4-BE49-F238E27FC236}">
+                <a16:creationId xmlns:a16="http://schemas.microsoft.com/office/drawing/2014/main" id="{9F276BF9-FF12-4DF5-885E-ADEC95043057}"/>
               </a:ext>
             </a:extLst>
           </p:cNvPr>
@@ -3366,21 +4151,76 @@
         </p:nvSpPr>
         <p:spPr>
           <a:xfrm xmlns:a="http://schemas.openxmlformats.org/drawingml/2006/main">
-            <a:off x="4324350" y="3943350"/>
-            <a:ext cx="3543300" cy="1581150"/>
+            <a:off x="5067300" y="4238625"/>
+            <a:ext cx="2609850" cy="428625"/>
           </a:xfrm>
           <a:prstGeom xmlns:a="http://schemas.openxmlformats.org/drawingml/2006/main" prst="rect">
             <a:avLst/>
           </a:prstGeom>
           <a:noFill xmlns:a="http://schemas.openxmlformats.org/drawingml/2006/main"/>
-          <a:ln xmlns:a="http://schemas.openxmlformats.org/drawingml/2006/main" w="9525">
-            <a:solidFill>
-              <a:srgbClr val="CBD0C4"/>
-            </a:solidFill>
+          <a:ln xmlns:a="http://schemas.openxmlformats.org/drawingml/2006/main" w="0">
+            <a:noFill/>
           </a:ln>
         </p:spPr>
         <p:txBody>
-          <a:bodyPr xmlns:a="http://schemas.openxmlformats.org/drawingml/2006/main" lIns="142875" tIns="114300" rIns="142875" bIns="0" anchor="t">
+          <a:bodyPr xmlns:a="http://schemas.openxmlformats.org/drawingml/2006/main" lIns="0" tIns="0" rIns="0" bIns="0" anchor="t">
+            <a:noAutofit/>
+          </a:bodyPr>
+          <a:lstStyle xmlns:a="http://schemas.openxmlformats.org/drawingml/2006/main"/>
+          <a:p xmlns:a="http://schemas.openxmlformats.org/drawingml/2006/main">
+            <a:pPr>
+              <a:defRPr sz="1725" b="1">
+                <a:solidFill>
+                  <a:srgbClr val="263C3A"/>
+                </a:solidFill>
+                <a:latin typeface="DejaVu Sans"/>
+                <a:ea typeface="DejaVu Sans"/>
+                <a:cs typeface="DejaVu Sans"/>
+              </a:defRPr>
+            </a:pPr>
+            <a:r>
+              <a:rPr sz="1725" b="1">
+                <a:solidFill>
+                  <a:srgbClr val="263C3A"/>
+                </a:solidFill>
+                <a:latin typeface="DejaVu Sans"/>
+                <a:ea typeface="DejaVu Sans"/>
+                <a:cs typeface="DejaVu Sans"/>
+              </a:rPr>
+              <a:t>Last week</a:t>
+            </a:r>
+          </a:p>
+        </p:txBody>
+      </p:sp>
+      <p:sp>
+        <p:nvSpPr>
+          <p:cNvPr id="30" name="">
+            <a:extLst xmlns:a="http://schemas.openxmlformats.org/drawingml/2006/main">
+              <a:ext uri="{FF2B5EF4-FFF2-40B4-BE49-F238E27FC236}">
+                <a16:creationId xmlns:a16="http://schemas.microsoft.com/office/drawing/2014/main" id="{5012EA4D-6298-49CB-AFB5-FF203756386F}"/>
+              </a:ext>
+            </a:extLst>
+          </p:cNvPr>
+          <p:cNvSpPr>
+            <a:spLocks xmlns:a="http://schemas.openxmlformats.org/drawingml/2006/main" noGrp="1"/>
+          </p:cNvSpPr>
+          <p:nvPr/>
+        </p:nvSpPr>
+        <p:spPr>
+          <a:xfrm xmlns:a="http://schemas.openxmlformats.org/drawingml/2006/main">
+            <a:off x="4533900" y="4762500"/>
+            <a:ext cx="3124200" cy="695325"/>
+          </a:xfrm>
+          <a:prstGeom xmlns:a="http://schemas.openxmlformats.org/drawingml/2006/main" prst="rect">
+            <a:avLst/>
+          </a:prstGeom>
+          <a:noFill xmlns:a="http://schemas.openxmlformats.org/drawingml/2006/main"/>
+          <a:ln xmlns:a="http://schemas.openxmlformats.org/drawingml/2006/main" w="0">
+            <a:noFill/>
+          </a:ln>
+        </p:spPr>
+        <p:txBody>
+          <a:bodyPr xmlns:a="http://schemas.openxmlformats.org/drawingml/2006/main" lIns="0" tIns="0" rIns="0" bIns="0" anchor="t">
             <a:noAutofit/>
           </a:bodyPr>
           <a:lstStyle xmlns:a="http://schemas.openxmlformats.org/drawingml/2006/main"/>
@@ -3388,56 +4228,152 @@
             <a:pPr>
               <a:defRPr sz="1950" b="0">
                 <a:solidFill>
-                  <a:srgbClr val="42473D"/>
+                  <a:srgbClr val="687572"/>
                 </a:solidFill>
-                <a:latin typeface="Arial"/>
-                <a:ea typeface="Arial"/>
-                <a:cs typeface="Arial"/>
+                <a:latin typeface="DejaVu Sans"/>
+                <a:ea typeface="DejaVu Sans"/>
+                <a:cs typeface="DejaVu Sans"/>
               </a:defRPr>
             </a:pPr>
             <a:r>
               <a:rPr sz="1950" b="0">
                 <a:solidFill>
-                  <a:srgbClr val="42473D"/>
+                  <a:srgbClr val="687572"/>
                 </a:solidFill>
-                <a:latin typeface="Arial"/>
-                <a:ea typeface="Arial"/>
-                <a:cs typeface="Arial"/>
+                <a:latin typeface="DejaVu Sans"/>
+                <a:ea typeface="DejaVu Sans"/>
+                <a:cs typeface="DejaVu Sans"/>
               </a:rPr>
-              <a:t>Last week</a:t>
+              <a:t>[Your prompt]</a:t>
             </a:r>
           </a:p>
+        </p:txBody>
+      </p:sp>
+      <p:sp>
+        <p:nvSpPr>
+          <p:cNvPr id="31" name="">
+            <a:extLst xmlns:a="http://schemas.openxmlformats.org/drawingml/2006/main">
+              <a:ext uri="{FF2B5EF4-FFF2-40B4-BE49-F238E27FC236}">
+                <a16:creationId xmlns:a16="http://schemas.microsoft.com/office/drawing/2014/main" id="{7E518A04-78A3-48E1-8EAF-6EA10D46A5F1}"/>
+              </a:ext>
+            </a:extLst>
+          </p:cNvPr>
+          <p:cNvSpPr>
+            <a:spLocks xmlns:a="http://schemas.openxmlformats.org/drawingml/2006/main" noGrp="1"/>
+          </p:cNvSpPr>
+          <p:nvPr/>
+        </p:nvSpPr>
+        <p:spPr>
+          <a:xfrm xmlns:a="http://schemas.openxmlformats.org/drawingml/2006/main">
+            <a:off x="8039100" y="4019550"/>
+            <a:ext cx="3543300" cy="1600200"/>
+          </a:xfrm>
+          <a:prstGeom xmlns:a="http://schemas.openxmlformats.org/drawingml/2006/main" prst="rect">
+            <a:avLst/>
+          </a:prstGeom>
+          <a:solidFill xmlns:a="http://schemas.openxmlformats.org/drawingml/2006/main">
+            <a:srgbClr val="EAF1EC"/>
+          </a:solidFill>
+          <a:ln xmlns:a="http://schemas.openxmlformats.org/drawingml/2006/main" w="9525">
+            <a:solidFill>
+              <a:srgbClr val="D4DFDB"/>
+            </a:solidFill>
+          </a:ln>
+        </p:spPr>
+      </p:sp>
+      <p:sp>
+        <p:nvSpPr>
+          <p:cNvPr id="32" name="">
+            <a:extLst xmlns:a="http://schemas.openxmlformats.org/drawingml/2006/main">
+              <a:ext uri="{FF2B5EF4-FFF2-40B4-BE49-F238E27FC236}">
+                <a16:creationId xmlns:a16="http://schemas.microsoft.com/office/drawing/2014/main" id="{EA8B8341-9FCE-4444-BB2F-27B50558BC90}"/>
+              </a:ext>
+            </a:extLst>
+          </p:cNvPr>
+          <p:cNvSpPr>
+            <a:spLocks xmlns:a="http://schemas.openxmlformats.org/drawingml/2006/main" noGrp="1"/>
+          </p:cNvSpPr>
+          <p:nvPr/>
+        </p:nvSpPr>
+        <p:spPr>
+          <a:xfrm xmlns:a="http://schemas.openxmlformats.org/drawingml/2006/main">
+            <a:off x="8229600" y="4191000"/>
+            <a:ext cx="381000" cy="381000"/>
+          </a:xfrm>
+          <a:prstGeom xmlns:a="http://schemas.openxmlformats.org/drawingml/2006/main" prst="ellipse">
+            <a:avLst/>
+          </a:prstGeom>
+          <a:solidFill xmlns:a="http://schemas.openxmlformats.org/drawingml/2006/main">
+            <a:srgbClr val="FFFFFF"/>
+          </a:solidFill>
+          <a:ln xmlns:a="http://schemas.openxmlformats.org/drawingml/2006/main" w="0">
+            <a:noFill/>
+          </a:ln>
+        </p:spPr>
+      </p:sp>
+      <p:sp>
+        <p:nvSpPr>
+          <p:cNvPr id="33" name="">
+            <a:extLst xmlns:a="http://schemas.openxmlformats.org/drawingml/2006/main">
+              <a:ext uri="{FF2B5EF4-FFF2-40B4-BE49-F238E27FC236}">
+                <a16:creationId xmlns:a16="http://schemas.microsoft.com/office/drawing/2014/main" id="{AE645F53-5B40-488F-BDAC-83C5924E90C3}"/>
+              </a:ext>
+            </a:extLst>
+          </p:cNvPr>
+          <p:cNvSpPr>
+            <a:spLocks xmlns:a="http://schemas.openxmlformats.org/drawingml/2006/main" noGrp="1"/>
+          </p:cNvSpPr>
+          <p:nvPr/>
+        </p:nvSpPr>
+        <p:spPr>
+          <a:xfrm xmlns:a="http://schemas.openxmlformats.org/drawingml/2006/main">
+            <a:off x="8286750" y="4257675"/>
+            <a:ext cx="342900" cy="285750"/>
+          </a:xfrm>
+          <a:prstGeom xmlns:a="http://schemas.openxmlformats.org/drawingml/2006/main" prst="rect">
+            <a:avLst/>
+          </a:prstGeom>
+          <a:noFill xmlns:a="http://schemas.openxmlformats.org/drawingml/2006/main"/>
+          <a:ln xmlns:a="http://schemas.openxmlformats.org/drawingml/2006/main" w="0">
+            <a:noFill/>
+          </a:ln>
+        </p:spPr>
+        <p:txBody>
+          <a:bodyPr xmlns:a="http://schemas.openxmlformats.org/drawingml/2006/main" lIns="0" tIns="0" rIns="0" bIns="0" anchor="t">
+            <a:noAutofit/>
+          </a:bodyPr>
+          <a:lstStyle xmlns:a="http://schemas.openxmlformats.org/drawingml/2006/main"/>
           <a:p xmlns:a="http://schemas.openxmlformats.org/drawingml/2006/main">
             <a:pPr>
-              <a:defRPr sz="1950" b="0">
+              <a:defRPr sz="1350" b="1">
                 <a:solidFill>
-                  <a:srgbClr val="42473D"/>
+                  <a:srgbClr val="263C3A"/>
                 </a:solidFill>
-                <a:latin typeface="Arial"/>
-                <a:ea typeface="Arial"/>
-                <a:cs typeface="Arial"/>
+                <a:latin typeface="DejaVu Sans"/>
+                <a:ea typeface="DejaVu Sans"/>
+                <a:cs typeface="DejaVu Sans"/>
               </a:defRPr>
             </a:pPr>
             <a:r>
-              <a:rPr sz="1950" b="0">
+              <a:rPr sz="1350" b="1">
                 <a:solidFill>
-                  <a:srgbClr val="42473D"/>
+                  <a:srgbClr val="263C3A"/>
                 </a:solidFill>
-                <a:latin typeface="Arial"/>
-                <a:ea typeface="Arial"/>
-                <a:cs typeface="Arial"/>
+                <a:latin typeface="DejaVu Sans"/>
+                <a:ea typeface="DejaVu Sans"/>
+                <a:cs typeface="DejaVu Sans"/>
               </a:rPr>
-              <a:t>[Add a prompt]</a:t>
+              <a:t>06</a:t>
             </a:r>
           </a:p>
         </p:txBody>
       </p:sp>
       <p:sp>
         <p:nvSpPr>
-          <p:cNvPr id="9" name="">
-            <a:extLst xmlns:a="http://schemas.openxmlformats.org/drawingml/2006/main">
-              <a:ext uri="{FF2B5EF4-FFF2-40B4-BE49-F238E27FC236}">
-                <a16:creationId xmlns:a16="http://schemas.microsoft.com/office/drawing/2014/main" id="{228DADE6-E34D-4525-B49C-B42F9F9DCB3C}"/>
+          <p:cNvPr id="34" name="">
+            <a:extLst xmlns:a="http://schemas.openxmlformats.org/drawingml/2006/main">
+              <a:ext uri="{FF2B5EF4-FFF2-40B4-BE49-F238E27FC236}">
+                <a16:creationId xmlns:a16="http://schemas.microsoft.com/office/drawing/2014/main" id="{E91A6A67-E1EF-42F6-95F7-10BF0B7B2F80}"/>
               </a:ext>
             </a:extLst>
           </p:cNvPr>
@@ -3448,21 +4384,76 @@
         </p:nvSpPr>
         <p:spPr>
           <a:xfrm xmlns:a="http://schemas.openxmlformats.org/drawingml/2006/main">
-            <a:off x="8039100" y="3943350"/>
-            <a:ext cx="3543300" cy="1581150"/>
+            <a:off x="8782050" y="4238625"/>
+            <a:ext cx="2609850" cy="428625"/>
           </a:xfrm>
           <a:prstGeom xmlns:a="http://schemas.openxmlformats.org/drawingml/2006/main" prst="rect">
             <a:avLst/>
           </a:prstGeom>
           <a:noFill xmlns:a="http://schemas.openxmlformats.org/drawingml/2006/main"/>
-          <a:ln xmlns:a="http://schemas.openxmlformats.org/drawingml/2006/main" w="9525">
-            <a:solidFill>
-              <a:srgbClr val="CBD0C4"/>
-            </a:solidFill>
+          <a:ln xmlns:a="http://schemas.openxmlformats.org/drawingml/2006/main" w="0">
+            <a:noFill/>
           </a:ln>
         </p:spPr>
         <p:txBody>
-          <a:bodyPr xmlns:a="http://schemas.openxmlformats.org/drawingml/2006/main" lIns="142875" tIns="114300" rIns="142875" bIns="0" anchor="t">
+          <a:bodyPr xmlns:a="http://schemas.openxmlformats.org/drawingml/2006/main" lIns="0" tIns="0" rIns="0" bIns="0" anchor="t">
+            <a:noAutofit/>
+          </a:bodyPr>
+          <a:lstStyle xmlns:a="http://schemas.openxmlformats.org/drawingml/2006/main"/>
+          <a:p xmlns:a="http://schemas.openxmlformats.org/drawingml/2006/main">
+            <a:pPr>
+              <a:defRPr sz="1725" b="1">
+                <a:solidFill>
+                  <a:srgbClr val="263C3A"/>
+                </a:solidFill>
+                <a:latin typeface="DejaVu Sans"/>
+                <a:ea typeface="DejaVu Sans"/>
+                <a:cs typeface="DejaVu Sans"/>
+              </a:defRPr>
+            </a:pPr>
+            <a:r>
+              <a:rPr sz="1725" b="1">
+                <a:solidFill>
+                  <a:srgbClr val="263C3A"/>
+                </a:solidFill>
+                <a:latin typeface="DejaVu Sans"/>
+                <a:ea typeface="DejaVu Sans"/>
+                <a:cs typeface="DejaVu Sans"/>
+              </a:rPr>
+              <a:t>Earlier learning</a:t>
+            </a:r>
+          </a:p>
+        </p:txBody>
+      </p:sp>
+      <p:sp>
+        <p:nvSpPr>
+          <p:cNvPr id="35" name="">
+            <a:extLst xmlns:a="http://schemas.openxmlformats.org/drawingml/2006/main">
+              <a:ext uri="{FF2B5EF4-FFF2-40B4-BE49-F238E27FC236}">
+                <a16:creationId xmlns:a16="http://schemas.microsoft.com/office/drawing/2014/main" id="{026BC75A-C529-4806-9360-1CF84F92F48B}"/>
+              </a:ext>
+            </a:extLst>
+          </p:cNvPr>
+          <p:cNvSpPr>
+            <a:spLocks xmlns:a="http://schemas.openxmlformats.org/drawingml/2006/main" noGrp="1"/>
+          </p:cNvSpPr>
+          <p:nvPr/>
+        </p:nvSpPr>
+        <p:spPr>
+          <a:xfrm xmlns:a="http://schemas.openxmlformats.org/drawingml/2006/main">
+            <a:off x="8248650" y="4762500"/>
+            <a:ext cx="3124200" cy="695325"/>
+          </a:xfrm>
+          <a:prstGeom xmlns:a="http://schemas.openxmlformats.org/drawingml/2006/main" prst="rect">
+            <a:avLst/>
+          </a:prstGeom>
+          <a:noFill xmlns:a="http://schemas.openxmlformats.org/drawingml/2006/main"/>
+          <a:ln xmlns:a="http://schemas.openxmlformats.org/drawingml/2006/main" w="0">
+            <a:noFill/>
+          </a:ln>
+        </p:spPr>
+        <p:txBody>
+          <a:bodyPr xmlns:a="http://schemas.openxmlformats.org/drawingml/2006/main" lIns="0" tIns="0" rIns="0" bIns="0" anchor="t">
             <a:noAutofit/>
           </a:bodyPr>
           <a:lstStyle xmlns:a="http://schemas.openxmlformats.org/drawingml/2006/main"/>
@@ -3470,56 +4461,33 @@
             <a:pPr>
               <a:defRPr sz="1950" b="0">
                 <a:solidFill>
-                  <a:srgbClr val="42473D"/>
+                  <a:srgbClr val="687572"/>
                 </a:solidFill>
-                <a:latin typeface="Arial"/>
-                <a:ea typeface="Arial"/>
-                <a:cs typeface="Arial"/>
+                <a:latin typeface="DejaVu Sans"/>
+                <a:ea typeface="DejaVu Sans"/>
+                <a:cs typeface="DejaVu Sans"/>
               </a:defRPr>
             </a:pPr>
             <a:r>
               <a:rPr sz="1950" b="0">
                 <a:solidFill>
-                  <a:srgbClr val="42473D"/>
+                  <a:srgbClr val="687572"/>
                 </a:solidFill>
-                <a:latin typeface="Arial"/>
-                <a:ea typeface="Arial"/>
-                <a:cs typeface="Arial"/>
+                <a:latin typeface="DejaVu Sans"/>
+                <a:ea typeface="DejaVu Sans"/>
+                <a:cs typeface="DejaVu Sans"/>
               </a:rPr>
-              <a:t>Earlier learning</a:t>
-            </a:r>
-          </a:p>
-          <a:p xmlns:a="http://schemas.openxmlformats.org/drawingml/2006/main">
-            <a:pPr>
-              <a:defRPr sz="1950" b="0">
-                <a:solidFill>
-                  <a:srgbClr val="42473D"/>
-                </a:solidFill>
-                <a:latin typeface="Arial"/>
-                <a:ea typeface="Arial"/>
-                <a:cs typeface="Arial"/>
-              </a:defRPr>
-            </a:pPr>
-            <a:r>
-              <a:rPr sz="1950" b="0">
-                <a:solidFill>
-                  <a:srgbClr val="42473D"/>
-                </a:solidFill>
-                <a:latin typeface="Arial"/>
-                <a:ea typeface="Arial"/>
-                <a:cs typeface="Arial"/>
-              </a:rPr>
-              <a:t>[Add a prompt]</a:t>
+              <a:t>[Your prompt]</a:t>
             </a:r>
           </a:p>
         </p:txBody>
       </p:sp>
       <p:sp>
         <p:nvSpPr>
-          <p:cNvPr id="10" name="">
-            <a:extLst xmlns:a="http://schemas.openxmlformats.org/drawingml/2006/main">
-              <a:ext uri="{FF2B5EF4-FFF2-40B4-BE49-F238E27FC236}">
-                <a16:creationId xmlns:a16="http://schemas.microsoft.com/office/drawing/2014/main" id="{60DD2E8A-B789-4F69-B95E-0A46428C21CF}"/>
+          <p:cNvPr id="36" name="">
+            <a:extLst xmlns:a="http://schemas.openxmlformats.org/drawingml/2006/main">
+              <a:ext uri="{FF2B5EF4-FFF2-40B4-BE49-F238E27FC236}">
+                <a16:creationId xmlns:a16="http://schemas.microsoft.com/office/drawing/2014/main" id="{E0AFB262-B2F5-45AF-B8F2-AF3B6EC040DA}"/>
               </a:ext>
             </a:extLst>
           </p:cNvPr>
@@ -3531,7 +4499,37 @@
         <p:spPr>
           <a:xfrm xmlns:a="http://schemas.openxmlformats.org/drawingml/2006/main">
             <a:off x="609600" y="5953125"/>
-            <a:ext cx="10972800" cy="381000"/>
+            <a:ext cx="10972800" cy="9525"/>
+          </a:xfrm>
+          <a:prstGeom xmlns:a="http://schemas.openxmlformats.org/drawingml/2006/main" prst="rect">
+            <a:avLst/>
+          </a:prstGeom>
+          <a:solidFill xmlns:a="http://schemas.openxmlformats.org/drawingml/2006/main">
+            <a:srgbClr val="A9BDB7"/>
+          </a:solidFill>
+          <a:ln xmlns:a="http://schemas.openxmlformats.org/drawingml/2006/main" w="0">
+            <a:noFill/>
+          </a:ln>
+        </p:spPr>
+      </p:sp>
+      <p:sp>
+        <p:nvSpPr>
+          <p:cNvPr id="37" name="">
+            <a:extLst xmlns:a="http://schemas.openxmlformats.org/drawingml/2006/main">
+              <a:ext uri="{FF2B5EF4-FFF2-40B4-BE49-F238E27FC236}">
+                <a16:creationId xmlns:a16="http://schemas.microsoft.com/office/drawing/2014/main" id="{A8BD25A0-93E9-4ADD-A0A0-CD516C952077}"/>
+              </a:ext>
+            </a:extLst>
+          </p:cNvPr>
+          <p:cNvSpPr>
+            <a:spLocks xmlns:a="http://schemas.openxmlformats.org/drawingml/2006/main" noGrp="1"/>
+          </p:cNvSpPr>
+          <p:nvPr/>
+        </p:nvSpPr>
+        <p:spPr>
+          <a:xfrm xmlns:a="http://schemas.openxmlformats.org/drawingml/2006/main">
+            <a:off x="609600" y="6191250"/>
+            <a:ext cx="3238500" cy="361950"/>
           </a:xfrm>
           <a:prstGeom xmlns:a="http://schemas.openxmlformats.org/drawingml/2006/main" prst="rect">
             <a:avLst/>
@@ -3548,35 +4546,35 @@
           <a:lstStyle xmlns:a="http://schemas.openxmlformats.org/drawingml/2006/main"/>
           <a:p xmlns:a="http://schemas.openxmlformats.org/drawingml/2006/main">
             <a:pPr>
-              <a:defRPr sz="1800" b="0">
+              <a:defRPr sz="1650" b="0">
                 <a:solidFill>
-                  <a:srgbClr val="28534A"/>
+                  <a:srgbClr val="687572"/>
                 </a:solidFill>
-                <a:latin typeface="Arial"/>
-                <a:ea typeface="Arial"/>
-                <a:cs typeface="Arial"/>
+                <a:latin typeface="DejaVu Sans"/>
+                <a:ea typeface="DejaVu Sans"/>
+                <a:cs typeface="DejaVu Sans"/>
               </a:defRPr>
             </a:pPr>
             <a:r>
-              <a:rPr sz="1800" b="0">
+              <a:rPr sz="1650" b="0">
                 <a:solidFill>
-                  <a:srgbClr val="28534A"/>
+                  <a:srgbClr val="687572"/>
                 </a:solidFill>
-                <a:latin typeface="Arial"/>
-                <a:ea typeface="Arial"/>
-                <a:cs typeface="Arial"/>
+                <a:latin typeface="DejaVu Sans"/>
+                <a:ea typeface="DejaVu Sans"/>
+                <a:cs typeface="DejaVu Sans"/>
               </a:rPr>
-              <a:t>Time: [Add minutes]     Check: [Add your feedback routine]</a:t>
+              <a:t>Time: [Minutes]</a:t>
             </a:r>
           </a:p>
         </p:txBody>
       </p:sp>
       <p:sp>
         <p:nvSpPr>
-          <p:cNvPr id="11" name="">
-            <a:extLst xmlns:a="http://schemas.openxmlformats.org/drawingml/2006/main">
-              <a:ext uri="{FF2B5EF4-FFF2-40B4-BE49-F238E27FC236}">
-                <a16:creationId xmlns:a16="http://schemas.microsoft.com/office/drawing/2014/main" id="{07B06DC1-AEE3-4682-BF5C-1AB33C0147E8}"/>
+          <p:cNvPr id="38" name="">
+            <a:extLst xmlns:a="http://schemas.openxmlformats.org/drawingml/2006/main">
+              <a:ext uri="{FF2B5EF4-FFF2-40B4-BE49-F238E27FC236}">
+                <a16:creationId xmlns:a16="http://schemas.microsoft.com/office/drawing/2014/main" id="{1CC2E807-34A1-44A2-8609-91444207B753}"/>
               </a:ext>
             </a:extLst>
           </p:cNvPr>
@@ -3587,8 +4585,8 @@
         </p:nvSpPr>
         <p:spPr>
           <a:xfrm xmlns:a="http://schemas.openxmlformats.org/drawingml/2006/main">
-            <a:off x="609600" y="6534150"/>
-            <a:ext cx="10972800" cy="209550"/>
+            <a:off x="4286250" y="6191250"/>
+            <a:ext cx="7296150" cy="361950"/>
           </a:xfrm>
           <a:prstGeom xmlns:a="http://schemas.openxmlformats.org/drawingml/2006/main" prst="rect">
             <a:avLst/>
@@ -3605,25 +4603,25 @@
           <a:lstStyle xmlns:a="http://schemas.openxmlformats.org/drawingml/2006/main"/>
           <a:p xmlns:a="http://schemas.openxmlformats.org/drawingml/2006/main">
             <a:pPr>
-              <a:defRPr sz="1050" b="0">
+              <a:defRPr sz="1650" b="0">
                 <a:solidFill>
-                  <a:srgbClr val="62675C"/>
+                  <a:srgbClr val="687572"/>
                 </a:solidFill>
-                <a:latin typeface="Arial"/>
-                <a:ea typeface="Arial"/>
-                <a:cs typeface="Arial"/>
+                <a:latin typeface="DejaVu Sans"/>
+                <a:ea typeface="DejaVu Sans"/>
+                <a:cs typeface="DejaVu Sans"/>
               </a:defRPr>
             </a:pPr>
             <a:r>
-              <a:rPr sz="1050" b="0">
+              <a:rPr sz="1650" b="0">
                 <a:solidFill>
-                  <a:srgbClr val="62675C"/>
+                  <a:srgbClr val="687572"/>
                 </a:solidFill>
-                <a:latin typeface="Arial"/>
-                <a:ea typeface="Arial"/>
-                <a:cs typeface="Arial"/>
+                <a:latin typeface="DejaVu Sans"/>
+                <a:ea typeface="DejaVu Sans"/>
+                <a:cs typeface="DejaVu Sans"/>
               </a:rPr>
-              <a:t>TNT Teaching Tools   Editable classroom template   Source and teacher guidance in speaker notes</a:t>
+              <a:t>Feedback: [Your checking routine]</a:t>
             </a:r>
           </a:p>
         </p:txBody>
@@ -3631,7 +4629,7 @@
     </p:spTree>
     <p:extLst>
       <p:ext uri="{BB962C8B-B14F-4D97-AF65-F5344CB8AC3E}">
-        <p14:creationId xmlns:p14="http://schemas.microsoft.com/office/powerpoint/2010/main" val="2108147653"/>
+        <p14:creationId xmlns:p14="http://schemas.microsoft.com/office/powerpoint/2010/main" val="703467694"/>
       </p:ext>
     </p:extLst>
   </p:cSld>
